--- a/presentation/pitch_fraudia_claims.pptx
+++ b/presentation/pitch_fraudia_claims.pptx
@@ -4,6 +4,9 @@
   <p:sldMasterIdLst>
     <p:sldMasterId id="2147483648" r:id="rId1"/>
   </p:sldMasterIdLst>
+  <p:notesMasterIdLst>
+    <p:notesMasterId r:id="rId12"/>
+  </p:notesMasterIdLst>
   <p:sldIdLst>
     <p:sldId id="256" r:id="rId2"/>
     <p:sldId id="257" r:id="rId3"/>
@@ -16,10 +19,7 @@
     <p:sldId id="264" r:id="rId10"/>
     <p:sldId id="265" r:id="rId11"/>
   </p:sldIdLst>
-  <p:notesMasterIdLst>
-    <p:notesMasterId r:id="rId12"/>
-  </p:notesMasterIdLst>
-  <p:sldSz cx="9144000" cy="5143500"/>
+  <p:sldSz cx="9144000" cy="5143500" type="screen16x9"/>
   <p:notesSz cx="5143500" cy="9144000"/>
   <p:defaultTextStyle>
     <a:lvl1pPr marL="0" algn="l" defTabSz="914400" rtl="0" eaLnBrk="1" latinLnBrk="0" hangingPunct="1">
@@ -113,6 +113,11 @@
       </a:defRPr>
     </a:lvl9pPr>
   </p:defaultTextStyle>
+  <p:extLst>
+    <p:ext uri="{EFAFB233-063F-42B5-8137-9DF3F51BA10A}">
+      <p15:sldGuideLst xmlns:p15="http://schemas.microsoft.com/office/powerpoint/2012/main"/>
+    </p:ext>
+  </p:extLst>
 </p:presentation>
 </file>
 
@@ -138,234 +143,10 @@
           <a:chExt cx="0" cy="0"/>
         </a:xfrm>
       </p:grpSpPr>
-      <p:sp>
-        <p:nvSpPr>
-          <p:cNvPr id="2" name="Header Placeholder 1"/>
-          <p:cNvSpPr>
-            <a:spLocks noGrp="1"/>
-          </p:cNvSpPr>
-          <p:nvPr>
-            <p:ph type="hdr" sz="quarter"/>
-          </p:nvPr>
-        </p:nvSpPr>
-        <p:spPr>
-          <a:xfrm>
-            <a:off x="0" y="0"/>
-            <a:ext cx="2971800" cy="458788"/>
-          </a:xfrm>
-          <a:prstGeom prst="rect">
-            <a:avLst/>
-          </a:prstGeom>
-        </p:spPr>
-        <p:txBody>
-          <a:bodyPr vert="horz" lIns="91440" tIns="45720" rIns="91440" bIns="45720" rtlCol="0"/>
-          <a:lstStyle>
-            <a:lvl1pPr algn="l">
-              <a:defRPr sz="1200"/>
-            </a:lvl1pPr>
-          </a:lstStyle>
-          <a:p>
-            <a:endParaRPr lang="en-US"/>
-          </a:p>
-        </p:txBody>
-      </p:sp>
-      <p:sp>
-        <p:nvSpPr>
-          <p:cNvPr id="3" name="Date Placeholder 2"/>
-          <p:cNvSpPr>
-            <a:spLocks noGrp="1"/>
-          </p:cNvSpPr>
-          <p:nvPr>
-            <p:ph type="dt" idx="1"/>
-          </p:nvPr>
-        </p:nvSpPr>
-        <p:spPr>
-          <a:xfrm>
-            <a:off x="3884613" y="0"/>
-            <a:ext cx="2971800" cy="458788"/>
-          </a:xfrm>
-          <a:prstGeom prst="rect">
-            <a:avLst/>
-          </a:prstGeom>
-        </p:spPr>
-        <p:txBody>
-          <a:bodyPr vert="horz" lIns="91440" tIns="45720" rIns="91440" bIns="45720" rtlCol="0"/>
-          <a:lstStyle>
-            <a:lvl1pPr algn="r">
-              <a:defRPr sz="1200"/>
-            </a:lvl1pPr>
-          </a:lstStyle>
-          <a:p>
-            <a:fld id="{5282F153-3F37-0F45-9E97-73ACFA13230C}" type="datetimeFigureOut">
-              <a:rPr lang="en-US"/>
-              <a:t>7/23/19</a:t>
-            </a:fld>
-            <a:endParaRPr lang="en-US"/>
-          </a:p>
-        </p:txBody>
-      </p:sp>
-      <p:sp>
-        <p:nvSpPr>
-          <p:cNvPr id="4" name="Slide Image Placeholder 3"/>
-          <p:cNvSpPr>
-            <a:spLocks noGrp="1" noRot="1" noChangeAspect="1"/>
-          </p:cNvSpPr>
-          <p:nvPr>
-            <p:ph type="sldImg" idx="2"/>
-          </p:nvPr>
-        </p:nvSpPr>
-        <p:spPr>
-          <a:xfrm>
-            <a:off x="685800" y="1143000"/>
-            <a:ext cx="5486400" cy="3086100"/>
-          </a:xfrm>
-          <a:prstGeom prst="rect">
-            <a:avLst/>
-          </a:prstGeom>
-          <a:noFill/>
-          <a:ln w="12700">
-            <a:solidFill>
-              <a:prstClr val="black"/>
-            </a:solidFill>
-          </a:ln>
-        </p:spPr>
-        <p:txBody>
-          <a:bodyPr vert="horz" lIns="91440" tIns="45720" rIns="91440" bIns="45720" rtlCol="0" anchor="ctr"/>
-          <a:lstStyle/>
-          <a:p>
-            <a:endParaRPr lang="en-US"/>
-          </a:p>
-        </p:txBody>
-      </p:sp>
-      <p:sp>
-        <p:nvSpPr>
-          <p:cNvPr id="5" name="Notes Placeholder 4"/>
-          <p:cNvSpPr>
-            <a:spLocks noGrp="1"/>
-          </p:cNvSpPr>
-          <p:nvPr>
-            <p:ph type="body" sz="quarter" idx="3"/>
-          </p:nvPr>
-        </p:nvSpPr>
-        <p:spPr>
-          <a:xfrm>
-            <a:off x="685800" y="4400550"/>
-            <a:ext cx="5486400" cy="3600450"/>
-          </a:xfrm>
-          <a:prstGeom prst="rect">
-            <a:avLst/>
-          </a:prstGeom>
-        </p:spPr>
-        <p:txBody>
-          <a:bodyPr vert="horz" lIns="91440" tIns="45720" rIns="91440" bIns="45720" rtlCol="0"/>
-          <a:lstStyle/>
-          <a:p>
-            <a:pPr lvl="0"/>
-            <a:r>
-              <a:rPr lang="en-US"/>
-              <a:t>Click to edit Master text styles</a:t>
-            </a:r>
-          </a:p>
-          <a:p>
-            <a:pPr lvl="1"/>
-            <a:r>
-              <a:rPr lang="en-US"/>
-              <a:t>Second level</a:t>
-            </a:r>
-          </a:p>
-          <a:p>
-            <a:pPr lvl="2"/>
-            <a:r>
-              <a:rPr lang="en-US"/>
-              <a:t>Third level</a:t>
-            </a:r>
-          </a:p>
-          <a:p>
-            <a:pPr lvl="3"/>
-            <a:r>
-              <a:rPr lang="en-US"/>
-              <a:t>Fourth level</a:t>
-            </a:r>
-          </a:p>
-          <a:p>
-            <a:pPr lvl="4"/>
-            <a:r>
-              <a:rPr lang="en-US"/>
-              <a:t>Fifth level</a:t>
-            </a:r>
-          </a:p>
-        </p:txBody>
-      </p:sp>
-      <p:sp>
-        <p:nvSpPr>
-          <p:cNvPr id="6" name="Footer Placeholder 5"/>
-          <p:cNvSpPr>
-            <a:spLocks noGrp="1"/>
-          </p:cNvSpPr>
-          <p:nvPr>
-            <p:ph type="ftr" sz="quarter" idx="4"/>
-          </p:nvPr>
-        </p:nvSpPr>
-        <p:spPr>
-          <a:xfrm>
-            <a:off x="0" y="8685213"/>
-            <a:ext cx="2971800" cy="458787"/>
-          </a:xfrm>
-          <a:prstGeom prst="rect">
-            <a:avLst/>
-          </a:prstGeom>
-        </p:spPr>
-        <p:txBody>
-          <a:bodyPr vert="horz" lIns="91440" tIns="45720" rIns="91440" bIns="45720" rtlCol="0" anchor="b"/>
-          <a:lstStyle>
-            <a:lvl1pPr algn="l">
-              <a:defRPr sz="1200"/>
-            </a:lvl1pPr>
-          </a:lstStyle>
-          <a:p>
-            <a:endParaRPr lang="en-US"/>
-          </a:p>
-        </p:txBody>
-      </p:sp>
-      <p:sp>
-        <p:nvSpPr>
-          <p:cNvPr id="7" name="Slide Number Placeholder 6"/>
-          <p:cNvSpPr>
-            <a:spLocks noGrp="1"/>
-          </p:cNvSpPr>
-          <p:nvPr>
-            <p:ph type="sldNum" sz="quarter" idx="5"/>
-          </p:nvPr>
-        </p:nvSpPr>
-        <p:spPr>
-          <a:xfrm>
-            <a:off x="3884613" y="8685213"/>
-            <a:ext cx="2971800" cy="458787"/>
-          </a:xfrm>
-          <a:prstGeom prst="rect">
-            <a:avLst/>
-          </a:prstGeom>
-        </p:spPr>
-        <p:txBody>
-          <a:bodyPr vert="horz" lIns="91440" tIns="45720" rIns="91440" bIns="45720" rtlCol="0" anchor="b"/>
-          <a:lstStyle>
-            <a:lvl1pPr algn="r">
-              <a:defRPr sz="1200"/>
-            </a:lvl1pPr>
-          </a:lstStyle>
-          <a:p>
-            <a:fld id="{CE5E9CC1-C706-0F49-92D6-E571CC5EEA8F}" type="slidenum">
-              <a:rPr lang="en-US"/>
-              <a:t>‹#›</a:t>
-            </a:fld>
-            <a:endParaRPr lang="en-US"/>
-          </a:p>
-        </p:txBody>
-      </p:sp>
     </p:spTree>
     <p:extLst>
       <p:ext uri="{BB962C8B-B14F-4D97-AF65-F5344CB8AC3E}">
-        <p14:creationId xmlns:p14="http://schemas.microsoft.com/office/powerpoint/2010/main" val="1024086991"/>
+        <p14:creationId xmlns:p14="http://schemas.microsoft.com/office/powerpoint/2010/main" val="766684637"/>
       </p:ext>
     </p:extLst>
   </p:cSld>
@@ -509,10 +290,6 @@
           <a:bodyPr/>
           <a:lstStyle/>
           <a:p>
-            <a:r>
-              <a:rPr lang="en-US" dirty="0"/>
-              <a:t/>
-            </a:r>
             <a:endParaRPr lang="en-US" dirty="0"/>
           </a:p>
         </p:txBody>
@@ -597,10 +374,6 @@
           <a:bodyPr/>
           <a:lstStyle/>
           <a:p>
-            <a:r>
-              <a:rPr lang="en-US" dirty="0"/>
-              <a:t/>
-            </a:r>
             <a:endParaRPr lang="en-US" dirty="0"/>
           </a:p>
         </p:txBody>
@@ -685,10 +458,6 @@
           <a:bodyPr/>
           <a:lstStyle/>
           <a:p>
-            <a:r>
-              <a:rPr lang="en-US" dirty="0"/>
-              <a:t/>
-            </a:r>
             <a:endParaRPr lang="en-US" dirty="0"/>
           </a:p>
         </p:txBody>
@@ -773,10 +542,6 @@
           <a:bodyPr/>
           <a:lstStyle/>
           <a:p>
-            <a:r>
-              <a:rPr lang="en-US" dirty="0"/>
-              <a:t/>
-            </a:r>
             <a:endParaRPr lang="en-US" dirty="0"/>
           </a:p>
         </p:txBody>
@@ -861,10 +626,6 @@
           <a:bodyPr/>
           <a:lstStyle/>
           <a:p>
-            <a:r>
-              <a:rPr lang="en-US" dirty="0"/>
-              <a:t/>
-            </a:r>
             <a:endParaRPr lang="en-US" dirty="0"/>
           </a:p>
         </p:txBody>
@@ -949,10 +710,6 @@
           <a:bodyPr/>
           <a:lstStyle/>
           <a:p>
-            <a:r>
-              <a:rPr lang="en-US" dirty="0"/>
-              <a:t/>
-            </a:r>
             <a:endParaRPr lang="en-US" dirty="0"/>
           </a:p>
         </p:txBody>
@@ -1037,10 +794,6 @@
           <a:bodyPr/>
           <a:lstStyle/>
           <a:p>
-            <a:r>
-              <a:rPr lang="en-US" dirty="0"/>
-              <a:t/>
-            </a:r>
             <a:endParaRPr lang="en-US" dirty="0"/>
           </a:p>
         </p:txBody>
@@ -1125,10 +878,6 @@
           <a:bodyPr/>
           <a:lstStyle/>
           <a:p>
-            <a:r>
-              <a:rPr lang="en-US" dirty="0"/>
-              <a:t/>
-            </a:r>
             <a:endParaRPr lang="en-US" dirty="0"/>
           </a:p>
         </p:txBody>
@@ -1213,10 +962,6 @@
           <a:bodyPr/>
           <a:lstStyle/>
           <a:p>
-            <a:r>
-              <a:rPr lang="en-US" dirty="0"/>
-              <a:t/>
-            </a:r>
             <a:endParaRPr lang="en-US" dirty="0"/>
           </a:p>
         </p:txBody>
@@ -1301,10 +1046,6 @@
           <a:bodyPr/>
           <a:lstStyle/>
           <a:p>
-            <a:r>
-              <a:rPr lang="en-US" dirty="0"/>
-              <a:t/>
-            </a:r>
             <a:endParaRPr lang="en-US" dirty="0"/>
           </a:p>
         </p:txBody>
@@ -1378,6 +1119,11 @@
 <file path=ppt/slideMasters/slideMaster1.xml><?xml version="1.0" encoding="utf-8"?>
 <p:sldMaster xmlns:a="http://schemas.openxmlformats.org/drawingml/2006/main" xmlns:r="http://schemas.openxmlformats.org/officeDocument/2006/relationships" xmlns:p="http://schemas.openxmlformats.org/presentationml/2006/main">
   <p:cSld>
+    <p:bg>
+      <p:bgRef idx="1001">
+        <a:schemeClr val="bg1"/>
+      </p:bgRef>
+    </p:bg>
     <p:spTree>
       <p:nvGrpSpPr>
         <p:cNvPr id="1" name=""/>
@@ -1660,6 +1406,7 @@
         <a:solidFill>
           <a:srgbClr val="132845"/>
         </a:solidFill>
+        <a:effectLst/>
       </p:bgPr>
     </p:bg>
     <p:spTree>
@@ -1747,7 +1494,7 @@
           <a:bodyPr wrap="square" rtlCol="0" anchor="ctr"/>
           <a:lstStyle/>
           <a:p>
-            <a:pPr algn="ctr" indent="0" marL="0">
+            <a:pPr marL="0" indent="0" algn="ctr">
               <a:buNone/>
             </a:pPr>
             <a:r>
@@ -1783,7 +1530,7 @@
           <a:bodyPr wrap="square" rtlCol="0" anchor="ctr"/>
           <a:lstStyle/>
           <a:p>
-            <a:pPr algn="ctr" indent="0" marL="0">
+            <a:pPr marL="0" indent="0" algn="ctr">
               <a:buNone/>
             </a:pPr>
             <a:r>
@@ -1822,7 +1569,7 @@
           <a:bodyPr wrap="square" rtlCol="0" anchor="ctr"/>
           <a:lstStyle/>
           <a:p>
-            <a:pPr algn="ctr" indent="0" marL="0">
+            <a:pPr marL="0" indent="0" algn="ctr">
               <a:buNone/>
             </a:pPr>
             <a:r>
@@ -1861,7 +1608,7 @@
           <a:bodyPr wrap="square" rtlCol="0" anchor="ctr"/>
           <a:lstStyle/>
           <a:p>
-            <a:pPr algn="ctr" indent="0" marL="0">
+            <a:pPr marL="0" indent="0" algn="ctr">
               <a:buNone/>
             </a:pPr>
             <a:r>
@@ -1900,7 +1647,7 @@
           <a:bodyPr wrap="square" lIns="0" tIns="0" rIns="0" bIns="0" rtlCol="0" anchor="ctr"/>
           <a:lstStyle/>
           <a:p>
-            <a:pPr indent="0" marL="0">
+            <a:pPr marL="0" indent="0">
               <a:buNone/>
             </a:pPr>
             <a:r>
@@ -1939,7 +1686,7 @@
           <a:bodyPr wrap="square" lIns="0" tIns="0" rIns="0" bIns="0" rtlCol="0" anchor="ctr"/>
           <a:lstStyle/>
           <a:p>
-            <a:pPr indent="0" marL="0">
+            <a:pPr marL="0" indent="0">
               <a:buNone/>
             </a:pPr>
             <a:r>
@@ -1978,7 +1725,7 @@
           <a:bodyPr wrap="square" lIns="0" tIns="0" rIns="0" bIns="0" rtlCol="0" anchor="ctr"/>
           <a:lstStyle/>
           <a:p>
-            <a:pPr indent="0" marL="0">
+            <a:pPr marL="0" indent="0">
               <a:buNone/>
             </a:pPr>
             <a:r>
@@ -2027,8 +1774,8 @@
         </p:nvSpPr>
         <p:spPr>
           <a:xfrm>
-            <a:off x="3200400" y="3291840"/>
-            <a:ext cx="5577840" cy="347472"/>
+            <a:off x="3200400" y="3291839"/>
+            <a:ext cx="5577840" cy="855615"/>
           </a:xfrm>
           <a:prstGeom prst="rect">
             <a:avLst/>
@@ -2040,9 +1787,20 @@
           <a:bodyPr wrap="square" lIns="0" tIns="0" rIns="0" bIns="0" rtlCol="0" anchor="ctr"/>
           <a:lstStyle/>
           <a:p>
-            <a:pPr indent="0" marL="0">
-              <a:buNone/>
-            </a:pPr>
+            <a:pPr marL="0" indent="0">
+              <a:buNone/>
+            </a:pPr>
+            <a:r>
+              <a:rPr lang="en-US" sz="1300" i="1" dirty="0" err="1">
+                <a:solidFill>
+                  <a:srgbClr val="94A3B8"/>
+                </a:solidFill>
+                <a:latin typeface="Calibri" pitchFamily="34" charset="0"/>
+                <a:ea typeface="Calibri" pitchFamily="34" charset="-122"/>
+                <a:cs typeface="Calibri" pitchFamily="34" charset="-120"/>
+              </a:rPr>
+              <a:t>Equipo</a:t>
+            </a:r>
             <a:r>
               <a:rPr lang="en-US" sz="1300" i="1" dirty="0">
                 <a:solidFill>
@@ -2052,7 +1810,137 @@
                 <a:ea typeface="Calibri" pitchFamily="34" charset="-122"/>
                 <a:cs typeface="Calibri" pitchFamily="34" charset="-120"/>
               </a:rPr>
-              <a:t>Inteligencia Artificial al servicio del analista humano</a:t>
+              <a:t> Alfa Buena </a:t>
+            </a:r>
+            <a:r>
+              <a:rPr lang="en-US" sz="1300" i="1" dirty="0" err="1">
+                <a:solidFill>
+                  <a:srgbClr val="94A3B8"/>
+                </a:solidFill>
+                <a:latin typeface="Calibri" pitchFamily="34" charset="0"/>
+                <a:ea typeface="Calibri" pitchFamily="34" charset="-122"/>
+                <a:cs typeface="Calibri" pitchFamily="34" charset="-120"/>
+              </a:rPr>
+              <a:t>Maravilla</a:t>
+            </a:r>
+            <a:r>
+              <a:rPr lang="en-US" sz="1300" i="1" dirty="0">
+                <a:solidFill>
+                  <a:srgbClr val="94A3B8"/>
+                </a:solidFill>
+                <a:latin typeface="Calibri" pitchFamily="34" charset="0"/>
+                <a:ea typeface="Calibri" pitchFamily="34" charset="-122"/>
+                <a:cs typeface="Calibri" pitchFamily="34" charset="-120"/>
+              </a:rPr>
+              <a:t> Onda </a:t>
+            </a:r>
+            <a:r>
+              <a:rPr lang="en-US" sz="1300" i="1" dirty="0" err="1">
+                <a:solidFill>
+                  <a:srgbClr val="94A3B8"/>
+                </a:solidFill>
+                <a:latin typeface="Calibri" pitchFamily="34" charset="0"/>
+                <a:ea typeface="Calibri" pitchFamily="34" charset="-122"/>
+                <a:cs typeface="Calibri" pitchFamily="34" charset="-120"/>
+              </a:rPr>
+              <a:t>Dinamita</a:t>
+            </a:r>
+            <a:r>
+              <a:rPr lang="en-US" sz="1300" i="1" dirty="0">
+                <a:solidFill>
+                  <a:srgbClr val="94A3B8"/>
+                </a:solidFill>
+                <a:latin typeface="Calibri" pitchFamily="34" charset="0"/>
+                <a:ea typeface="Calibri" pitchFamily="34" charset="-122"/>
+                <a:cs typeface="Calibri" pitchFamily="34" charset="-120"/>
+              </a:rPr>
+              <a:t> </a:t>
+            </a:r>
+            <a:r>
+              <a:rPr lang="en-US" sz="1300" i="1" dirty="0" err="1">
+                <a:solidFill>
+                  <a:srgbClr val="94A3B8"/>
+                </a:solidFill>
+                <a:latin typeface="Calibri" pitchFamily="34" charset="0"/>
+                <a:ea typeface="Calibri" pitchFamily="34" charset="-122"/>
+                <a:cs typeface="Calibri" pitchFamily="34" charset="-120"/>
+              </a:rPr>
+              <a:t>Escuadrón</a:t>
+            </a:r>
+            <a:r>
+              <a:rPr lang="en-US" sz="1300" i="1" dirty="0">
+                <a:solidFill>
+                  <a:srgbClr val="94A3B8"/>
+                </a:solidFill>
+                <a:latin typeface="Calibri" pitchFamily="34" charset="0"/>
+                <a:ea typeface="Calibri" pitchFamily="34" charset="-122"/>
+                <a:cs typeface="Calibri" pitchFamily="34" charset="-120"/>
+              </a:rPr>
+              <a:t> Lobo</a:t>
+            </a:r>
+          </a:p>
+          <a:p>
+            <a:pPr marL="0" indent="0">
+              <a:buNone/>
+            </a:pPr>
+            <a:endParaRPr lang="en-US" sz="1300" i="1" dirty="0">
+              <a:solidFill>
+                <a:srgbClr val="94A3B8"/>
+              </a:solidFill>
+              <a:latin typeface="Calibri" pitchFamily="34" charset="0"/>
+              <a:ea typeface="Calibri" pitchFamily="34" charset="-122"/>
+              <a:cs typeface="Calibri" pitchFamily="34" charset="-120"/>
+            </a:endParaRPr>
+          </a:p>
+          <a:p>
+            <a:pPr marL="285750" indent="-285750">
+              <a:buFont typeface="Wingdings" panose="05000000000000000000" pitchFamily="2" charset="2"/>
+              <a:buChar char="§"/>
+            </a:pPr>
+            <a:r>
+              <a:rPr lang="en-US" sz="1300" i="1" dirty="0">
+                <a:solidFill>
+                  <a:srgbClr val="94A3B8"/>
+                </a:solidFill>
+                <a:latin typeface="Calibri" pitchFamily="34" charset="0"/>
+                <a:ea typeface="Calibri" pitchFamily="34" charset="-122"/>
+                <a:cs typeface="Calibri" pitchFamily="34" charset="-120"/>
+              </a:rPr>
+              <a:t>Cristian Acalo</a:t>
+            </a:r>
+          </a:p>
+          <a:p>
+            <a:pPr marL="285750" indent="-285750">
+              <a:buFont typeface="Wingdings" panose="05000000000000000000" pitchFamily="2" charset="2"/>
+              <a:buChar char="§"/>
+            </a:pPr>
+            <a:r>
+              <a:rPr lang="en-US" sz="1300" i="1" dirty="0">
+                <a:solidFill>
+                  <a:srgbClr val="94A3B8"/>
+                </a:solidFill>
+                <a:latin typeface="Calibri" pitchFamily="34" charset="0"/>
+                <a:ea typeface="Calibri" pitchFamily="34" charset="-122"/>
+                <a:cs typeface="Calibri" pitchFamily="34" charset="-120"/>
+              </a:rPr>
+              <a:t>Leonardo Obando</a:t>
+            </a:r>
+          </a:p>
+          <a:p>
+            <a:pPr marL="285750" indent="-285750">
+              <a:buFont typeface="Wingdings" panose="05000000000000000000" pitchFamily="2" charset="2"/>
+              <a:buChar char="§"/>
+            </a:pPr>
+            <a:r>
+              <a:rPr lang="en-US" sz="1300" i="1" dirty="0">
+                <a:solidFill>
+                  <a:srgbClr val="94A3B8"/>
+                </a:solidFill>
+                <a:latin typeface="Calibri" pitchFamily="34" charset="0"/>
+                <a:ea typeface="Calibri" pitchFamily="34" charset="-122"/>
+                <a:cs typeface="Calibri" pitchFamily="34" charset="-120"/>
+              </a:rPr>
+              <a:t>Ariel Guevara</a:t>
             </a:r>
             <a:endParaRPr lang="en-US" sz="1300" dirty="0"/>
           </a:p>
@@ -2070,9 +1958,7 @@
             <a:ext cx="1261872" cy="310896"/>
           </a:xfrm>
           <a:prstGeom prst="rect">
-            <a:avLst>
-              <a:gd name="adj" fmla="val 17647"/>
-            </a:avLst>
+            <a:avLst/>
           </a:prstGeom>
           <a:solidFill>
             <a:srgbClr val="1E3A5F"/>
@@ -2106,7 +1992,7 @@
           <a:bodyPr wrap="square" rtlCol="0" anchor="ctr"/>
           <a:lstStyle/>
           <a:p>
-            <a:pPr algn="ctr" indent="0" marL="0">
+            <a:pPr marL="0" indent="0" algn="ctr">
               <a:buNone/>
             </a:pPr>
             <a:r>
@@ -2136,9 +2022,7 @@
             <a:ext cx="1261872" cy="310896"/>
           </a:xfrm>
           <a:prstGeom prst="rect">
-            <a:avLst>
-              <a:gd name="adj" fmla="val 17647"/>
-            </a:avLst>
+            <a:avLst/>
           </a:prstGeom>
           <a:solidFill>
             <a:srgbClr val="1E3A5F"/>
@@ -2172,7 +2056,7 @@
           <a:bodyPr wrap="square" rtlCol="0" anchor="ctr"/>
           <a:lstStyle/>
           <a:p>
-            <a:pPr algn="ctr" indent="0" marL="0">
+            <a:pPr marL="0" indent="0" algn="ctr">
               <a:buNone/>
             </a:pPr>
             <a:r>
@@ -2202,9 +2086,7 @@
             <a:ext cx="1261872" cy="310896"/>
           </a:xfrm>
           <a:prstGeom prst="rect">
-            <a:avLst>
-              <a:gd name="adj" fmla="val 17647"/>
-            </a:avLst>
+            <a:avLst/>
           </a:prstGeom>
           <a:solidFill>
             <a:srgbClr val="1E3A5F"/>
@@ -2238,7 +2120,7 @@
           <a:bodyPr wrap="square" rtlCol="0" anchor="ctr"/>
           <a:lstStyle/>
           <a:p>
-            <a:pPr algn="ctr" indent="0" marL="0">
+            <a:pPr marL="0" indent="0" algn="ctr">
               <a:buNone/>
             </a:pPr>
             <a:r>
@@ -2268,9 +2150,7 @@
             <a:ext cx="1261872" cy="310896"/>
           </a:xfrm>
           <a:prstGeom prst="rect">
-            <a:avLst>
-              <a:gd name="adj" fmla="val 17647"/>
-            </a:avLst>
+            <a:avLst/>
           </a:prstGeom>
           <a:solidFill>
             <a:srgbClr val="1E3A5F"/>
@@ -2304,7 +2184,7 @@
           <a:bodyPr wrap="square" rtlCol="0" anchor="ctr"/>
           <a:lstStyle/>
           <a:p>
-            <a:pPr algn="ctr" indent="0" marL="0">
+            <a:pPr marL="0" indent="0" algn="ctr">
               <a:buNone/>
             </a:pPr>
             <a:r>
@@ -2338,6 +2218,7 @@
         <a:solidFill>
           <a:srgbClr val="132845"/>
         </a:solidFill>
+        <a:effectLst/>
       </p:bgPr>
     </p:bg>
     <p:spTree>
@@ -2400,7 +2281,7 @@
           <a:bodyPr wrap="square" rtlCol="0" anchor="ctr"/>
           <a:lstStyle/>
           <a:p>
-            <a:pPr algn="ctr" indent="0" marL="0">
+            <a:pPr marL="0" indent="0" algn="ctr">
               <a:buNone/>
             </a:pPr>
             <a:r>
@@ -2423,7 +2304,7 @@
         </p:nvSpPr>
         <p:spPr>
           <a:xfrm>
-            <a:off x="365760" y="548640"/>
+            <a:off x="297180" y="1649653"/>
             <a:ext cx="5669280" cy="1645920"/>
           </a:xfrm>
           <a:prstGeom prst="rect">
@@ -2436,11 +2317,11 @@
           <a:bodyPr wrap="square" lIns="0" tIns="0" rIns="0" bIns="0" rtlCol="0" anchor="ctr"/>
           <a:lstStyle/>
           <a:p>
-            <a:pPr indent="0" marL="0">
-              <a:buNone/>
-            </a:pPr>
-            <a:r>
-              <a:rPr lang="en-US" sz="4600" b="1" dirty="0">
+            <a:pPr marL="0" indent="0" algn="ctr">
+              <a:buNone/>
+            </a:pPr>
+            <a:r>
+              <a:rPr lang="es-419" sz="8000" b="1" dirty="0">
                 <a:solidFill>
                   <a:srgbClr val="FFFFFF"/>
                 </a:solidFill>
@@ -2448,16 +2329,10 @@
                 <a:ea typeface="Calibri" pitchFamily="34" charset="-122"/>
                 <a:cs typeface="Calibri" pitchFamily="34" charset="-120"/>
               </a:rPr>
-              <a:t>Listo para</a:t>
-            </a:r>
-            <a:endParaRPr lang="en-US" sz="4600" dirty="0"/>
-          </a:p>
-          <a:p>
-            <a:pPr indent="0" marL="0">
-              <a:buNone/>
-            </a:pPr>
-            <a:r>
-              <a:rPr lang="en-US" sz="4600" b="1" dirty="0">
+              <a:t>¡</a:t>
+            </a:r>
+            <a:r>
+              <a:rPr lang="en-US" sz="8000" b="1" dirty="0">
                 <a:solidFill>
                   <a:srgbClr val="FFFFFF"/>
                 </a:solidFill>
@@ -2465,9 +2340,9 @@
                 <a:ea typeface="Calibri" pitchFamily="34" charset="-122"/>
                 <a:cs typeface="Calibri" pitchFamily="34" charset="-120"/>
               </a:rPr>
-              <a:t>Calificar</a:t>
-            </a:r>
-            <a:endParaRPr lang="en-US" sz="4600" dirty="0"/>
+              <a:t>Gracias!</a:t>
+            </a:r>
+            <a:endParaRPr lang="en-US" sz="8000" dirty="0"/>
           </a:p>
         </p:txBody>
       </p:sp>
@@ -2479,7 +2354,7 @@
         </p:nvSpPr>
         <p:spPr>
           <a:xfrm>
-            <a:off x="365760" y="2331720"/>
+            <a:off x="608356" y="639769"/>
             <a:ext cx="5303520" cy="0"/>
           </a:xfrm>
           <a:prstGeom prst="line">
@@ -2496,506 +2371,6 @@
       </p:sp>
       <p:sp>
         <p:nvSpPr>
-          <p:cNvPr id="6" name="Shape 4"/>
-          <p:cNvSpPr/>
-          <p:nvPr/>
-        </p:nvSpPr>
-        <p:spPr>
-          <a:xfrm>
-            <a:off x="365760" y="2569464"/>
-            <a:ext cx="274320" cy="274320"/>
-          </a:xfrm>
-          <a:prstGeom prst="rect">
-            <a:avLst/>
-          </a:prstGeom>
-          <a:solidFill>
-            <a:srgbClr val="16A34A"/>
-          </a:solidFill>
-          <a:ln w="12700">
-            <a:solidFill>
-              <a:srgbClr val="16A34A"/>
-            </a:solidFill>
-            <a:prstDash val="solid"/>
-          </a:ln>
-        </p:spPr>
-      </p:sp>
-      <p:sp>
-        <p:nvSpPr>
-          <p:cNvPr id="7" name="Text 5"/>
-          <p:cNvSpPr/>
-          <p:nvPr/>
-        </p:nvSpPr>
-        <p:spPr>
-          <a:xfrm>
-            <a:off x="365760" y="2569464"/>
-            <a:ext cx="274320" cy="274320"/>
-          </a:xfrm>
-          <a:prstGeom prst="rect">
-            <a:avLst/>
-          </a:prstGeom>
-          <a:noFill/>
-          <a:ln/>
-        </p:spPr>
-        <p:txBody>
-          <a:bodyPr wrap="square" rtlCol="0" anchor="ctr"/>
-          <a:lstStyle/>
-          <a:p>
-            <a:pPr algn="ctr" indent="0" marL="0">
-              <a:buNone/>
-            </a:pPr>
-            <a:r>
-              <a:rPr lang="en-US" sz="1200" b="1" dirty="0">
-                <a:solidFill>
-                  <a:srgbClr val="FFFFFF"/>
-                </a:solidFill>
-              </a:rPr>
-              <a:t>✓</a:t>
-            </a:r>
-            <a:endParaRPr lang="en-US" sz="1200" dirty="0"/>
-          </a:p>
-        </p:txBody>
-      </p:sp>
-      <p:sp>
-        <p:nvSpPr>
-          <p:cNvPr id="8" name="Text 6"/>
-          <p:cNvSpPr/>
-          <p:nvPr/>
-        </p:nvSpPr>
-        <p:spPr>
-          <a:xfrm>
-            <a:off x="749808" y="2514600"/>
-            <a:ext cx="5303520" cy="347472"/>
-          </a:xfrm>
-          <a:prstGeom prst="rect">
-            <a:avLst/>
-          </a:prstGeom>
-          <a:noFill/>
-          <a:ln/>
-        </p:spPr>
-        <p:txBody>
-          <a:bodyPr wrap="square" lIns="0" tIns="0" rIns="0" bIns="0" rtlCol="0" anchor="ctr"/>
-          <a:lstStyle/>
-          <a:p>
-            <a:pPr indent="0" marL="0">
-              <a:buNone/>
-            </a:pPr>
-            <a:r>
-              <a:rPr lang="en-US" sz="1200" dirty="0">
-                <a:solidFill>
-                  <a:srgbClr val="FFFFFF"/>
-                </a:solidFill>
-                <a:latin typeface="Calibri" pitchFamily="34" charset="0"/>
-                <a:ea typeface="Calibri" pitchFamily="34" charset="-122"/>
-                <a:cs typeface="Calibri" pitchFamily="34" charset="-120"/>
-              </a:rPr>
-              <a:t>Prototipo funcional — Dashboard Streamlit 7 páginas</a:t>
-            </a:r>
-            <a:endParaRPr lang="en-US" sz="1200" dirty="0"/>
-          </a:p>
-        </p:txBody>
-      </p:sp>
-      <p:sp>
-        <p:nvSpPr>
-          <p:cNvPr id="9" name="Shape 7"/>
-          <p:cNvSpPr/>
-          <p:nvPr/>
-        </p:nvSpPr>
-        <p:spPr>
-          <a:xfrm>
-            <a:off x="365760" y="2953512"/>
-            <a:ext cx="274320" cy="274320"/>
-          </a:xfrm>
-          <a:prstGeom prst="rect">
-            <a:avLst/>
-          </a:prstGeom>
-          <a:solidFill>
-            <a:srgbClr val="16A34A"/>
-          </a:solidFill>
-          <a:ln w="12700">
-            <a:solidFill>
-              <a:srgbClr val="16A34A"/>
-            </a:solidFill>
-            <a:prstDash val="solid"/>
-          </a:ln>
-        </p:spPr>
-      </p:sp>
-      <p:sp>
-        <p:nvSpPr>
-          <p:cNvPr id="10" name="Text 8"/>
-          <p:cNvSpPr/>
-          <p:nvPr/>
-        </p:nvSpPr>
-        <p:spPr>
-          <a:xfrm>
-            <a:off x="365760" y="2953512"/>
-            <a:ext cx="274320" cy="274320"/>
-          </a:xfrm>
-          <a:prstGeom prst="rect">
-            <a:avLst/>
-          </a:prstGeom>
-          <a:noFill/>
-          <a:ln/>
-        </p:spPr>
-        <p:txBody>
-          <a:bodyPr wrap="square" rtlCol="0" anchor="ctr"/>
-          <a:lstStyle/>
-          <a:p>
-            <a:pPr algn="ctr" indent="0" marL="0">
-              <a:buNone/>
-            </a:pPr>
-            <a:r>
-              <a:rPr lang="en-US" sz="1200" b="1" dirty="0">
-                <a:solidFill>
-                  <a:srgbClr val="FFFFFF"/>
-                </a:solidFill>
-              </a:rPr>
-              <a:t>✓</a:t>
-            </a:r>
-            <a:endParaRPr lang="en-US" sz="1200" dirty="0"/>
-          </a:p>
-        </p:txBody>
-      </p:sp>
-      <p:sp>
-        <p:nvSpPr>
-          <p:cNvPr id="11" name="Text 9"/>
-          <p:cNvSpPr/>
-          <p:nvPr/>
-        </p:nvSpPr>
-        <p:spPr>
-          <a:xfrm>
-            <a:off x="749808" y="2898648"/>
-            <a:ext cx="5303520" cy="347472"/>
-          </a:xfrm>
-          <a:prstGeom prst="rect">
-            <a:avLst/>
-          </a:prstGeom>
-          <a:noFill/>
-          <a:ln/>
-        </p:spPr>
-        <p:txBody>
-          <a:bodyPr wrap="square" lIns="0" tIns="0" rIns="0" bIns="0" rtlCol="0" anchor="ctr"/>
-          <a:lstStyle/>
-          <a:p>
-            <a:pPr indent="0" marL="0">
-              <a:buNone/>
-            </a:pPr>
-            <a:r>
-              <a:rPr lang="en-US" sz="1200" dirty="0">
-                <a:solidFill>
-                  <a:srgbClr val="FFFFFF"/>
-                </a:solidFill>
-                <a:latin typeface="Calibri" pitchFamily="34" charset="0"/>
-                <a:ea typeface="Calibri" pitchFamily="34" charset="-122"/>
-                <a:cs typeface="Calibri" pitchFamily="34" charset="-120"/>
-              </a:rPr>
-              <a:t>Código fuente modular — GitHub con estructura estándar</a:t>
-            </a:r>
-            <a:endParaRPr lang="en-US" sz="1200" dirty="0"/>
-          </a:p>
-        </p:txBody>
-      </p:sp>
-      <p:sp>
-        <p:nvSpPr>
-          <p:cNvPr id="12" name="Shape 10"/>
-          <p:cNvSpPr/>
-          <p:nvPr/>
-        </p:nvSpPr>
-        <p:spPr>
-          <a:xfrm>
-            <a:off x="365760" y="3337560"/>
-            <a:ext cx="274320" cy="274320"/>
-          </a:xfrm>
-          <a:prstGeom prst="rect">
-            <a:avLst/>
-          </a:prstGeom>
-          <a:solidFill>
-            <a:srgbClr val="16A34A"/>
-          </a:solidFill>
-          <a:ln w="12700">
-            <a:solidFill>
-              <a:srgbClr val="16A34A"/>
-            </a:solidFill>
-            <a:prstDash val="solid"/>
-          </a:ln>
-        </p:spPr>
-      </p:sp>
-      <p:sp>
-        <p:nvSpPr>
-          <p:cNvPr id="13" name="Text 11"/>
-          <p:cNvSpPr/>
-          <p:nvPr/>
-        </p:nvSpPr>
-        <p:spPr>
-          <a:xfrm>
-            <a:off x="365760" y="3337560"/>
-            <a:ext cx="274320" cy="274320"/>
-          </a:xfrm>
-          <a:prstGeom prst="rect">
-            <a:avLst/>
-          </a:prstGeom>
-          <a:noFill/>
-          <a:ln/>
-        </p:spPr>
-        <p:txBody>
-          <a:bodyPr wrap="square" rtlCol="0" anchor="ctr"/>
-          <a:lstStyle/>
-          <a:p>
-            <a:pPr algn="ctr" indent="0" marL="0">
-              <a:buNone/>
-            </a:pPr>
-            <a:r>
-              <a:rPr lang="en-US" sz="1200" b="1" dirty="0">
-                <a:solidFill>
-                  <a:srgbClr val="FFFFFF"/>
-                </a:solidFill>
-              </a:rPr>
-              <a:t>✓</a:t>
-            </a:r>
-            <a:endParaRPr lang="en-US" sz="1200" dirty="0"/>
-          </a:p>
-        </p:txBody>
-      </p:sp>
-      <p:sp>
-        <p:nvSpPr>
-          <p:cNvPr id="14" name="Text 12"/>
-          <p:cNvSpPr/>
-          <p:nvPr/>
-        </p:nvSpPr>
-        <p:spPr>
-          <a:xfrm>
-            <a:off x="749808" y="3282696"/>
-            <a:ext cx="5303520" cy="347472"/>
-          </a:xfrm>
-          <a:prstGeom prst="rect">
-            <a:avLst/>
-          </a:prstGeom>
-          <a:noFill/>
-          <a:ln/>
-        </p:spPr>
-        <p:txBody>
-          <a:bodyPr wrap="square" lIns="0" tIns="0" rIns="0" bIns="0" rtlCol="0" anchor="ctr"/>
-          <a:lstStyle/>
-          <a:p>
-            <a:pPr indent="0" marL="0">
-              <a:buNone/>
-            </a:pPr>
-            <a:r>
-              <a:rPr lang="en-US" sz="1200" dirty="0">
-                <a:solidFill>
-                  <a:srgbClr val="FFFFFF"/>
-                </a:solidFill>
-                <a:latin typeface="Calibri" pitchFamily="34" charset="0"/>
-                <a:ea typeface="Calibri" pitchFamily="34" charset="-122"/>
-                <a:cs typeface="Calibri" pitchFamily="34" charset="-120"/>
-              </a:rPr>
-              <a:t>Dataset sintético — 500 siniestros, 174 asegurados, 33 proveedores</a:t>
-            </a:r>
-            <a:endParaRPr lang="en-US" sz="1200" dirty="0"/>
-          </a:p>
-        </p:txBody>
-      </p:sp>
-      <p:sp>
-        <p:nvSpPr>
-          <p:cNvPr id="15" name="Shape 13"/>
-          <p:cNvSpPr/>
-          <p:nvPr/>
-        </p:nvSpPr>
-        <p:spPr>
-          <a:xfrm>
-            <a:off x="365760" y="3721608"/>
-            <a:ext cx="274320" cy="274320"/>
-          </a:xfrm>
-          <a:prstGeom prst="rect">
-            <a:avLst/>
-          </a:prstGeom>
-          <a:solidFill>
-            <a:srgbClr val="16A34A"/>
-          </a:solidFill>
-          <a:ln w="12700">
-            <a:solidFill>
-              <a:srgbClr val="16A34A"/>
-            </a:solidFill>
-            <a:prstDash val="solid"/>
-          </a:ln>
-        </p:spPr>
-      </p:sp>
-      <p:sp>
-        <p:nvSpPr>
-          <p:cNvPr id="16" name="Text 14"/>
-          <p:cNvSpPr/>
-          <p:nvPr/>
-        </p:nvSpPr>
-        <p:spPr>
-          <a:xfrm>
-            <a:off x="365760" y="3721608"/>
-            <a:ext cx="274320" cy="274320"/>
-          </a:xfrm>
-          <a:prstGeom prst="rect">
-            <a:avLst/>
-          </a:prstGeom>
-          <a:noFill/>
-          <a:ln/>
-        </p:spPr>
-        <p:txBody>
-          <a:bodyPr wrap="square" rtlCol="0" anchor="ctr"/>
-          <a:lstStyle/>
-          <a:p>
-            <a:pPr algn="ctr" indent="0" marL="0">
-              <a:buNone/>
-            </a:pPr>
-            <a:r>
-              <a:rPr lang="en-US" sz="1200" b="1" dirty="0">
-                <a:solidFill>
-                  <a:srgbClr val="FFFFFF"/>
-                </a:solidFill>
-              </a:rPr>
-              <a:t>✓</a:t>
-            </a:r>
-            <a:endParaRPr lang="en-US" sz="1200" dirty="0"/>
-          </a:p>
-        </p:txBody>
-      </p:sp>
-      <p:sp>
-        <p:nvSpPr>
-          <p:cNvPr id="17" name="Text 15"/>
-          <p:cNvSpPr/>
-          <p:nvPr/>
-        </p:nvSpPr>
-        <p:spPr>
-          <a:xfrm>
-            <a:off x="749808" y="3666744"/>
-            <a:ext cx="5303520" cy="347472"/>
-          </a:xfrm>
-          <a:prstGeom prst="rect">
-            <a:avLst/>
-          </a:prstGeom>
-          <a:noFill/>
-          <a:ln/>
-        </p:spPr>
-        <p:txBody>
-          <a:bodyPr wrap="square" lIns="0" tIns="0" rIns="0" bIns="0" rtlCol="0" anchor="ctr"/>
-          <a:lstStyle/>
-          <a:p>
-            <a:pPr indent="0" marL="0">
-              <a:buNone/>
-            </a:pPr>
-            <a:r>
-              <a:rPr lang="en-US" sz="1200" dirty="0">
-                <a:solidFill>
-                  <a:srgbClr val="FFFFFF"/>
-                </a:solidFill>
-                <a:latin typeface="Calibri" pitchFamily="34" charset="0"/>
-                <a:ea typeface="Calibri" pitchFamily="34" charset="-122"/>
-                <a:cs typeface="Calibri" pitchFamily="34" charset="-120"/>
-              </a:rPr>
-              <a:t>Documentación completa — arquitectura, modelo datos, reglas, IA</a:t>
-            </a:r>
-            <a:endParaRPr lang="en-US" sz="1200" dirty="0"/>
-          </a:p>
-        </p:txBody>
-      </p:sp>
-      <p:sp>
-        <p:nvSpPr>
-          <p:cNvPr id="18" name="Shape 16"/>
-          <p:cNvSpPr/>
-          <p:nvPr/>
-        </p:nvSpPr>
-        <p:spPr>
-          <a:xfrm>
-            <a:off x="365760" y="4105656"/>
-            <a:ext cx="274320" cy="274320"/>
-          </a:xfrm>
-          <a:prstGeom prst="rect">
-            <a:avLst/>
-          </a:prstGeom>
-          <a:solidFill>
-            <a:srgbClr val="16A34A"/>
-          </a:solidFill>
-          <a:ln w="12700">
-            <a:solidFill>
-              <a:srgbClr val="16A34A"/>
-            </a:solidFill>
-            <a:prstDash val="solid"/>
-          </a:ln>
-        </p:spPr>
-      </p:sp>
-      <p:sp>
-        <p:nvSpPr>
-          <p:cNvPr id="19" name="Text 17"/>
-          <p:cNvSpPr/>
-          <p:nvPr/>
-        </p:nvSpPr>
-        <p:spPr>
-          <a:xfrm>
-            <a:off x="365760" y="4105656"/>
-            <a:ext cx="274320" cy="274320"/>
-          </a:xfrm>
-          <a:prstGeom prst="rect">
-            <a:avLst/>
-          </a:prstGeom>
-          <a:noFill/>
-          <a:ln/>
-        </p:spPr>
-        <p:txBody>
-          <a:bodyPr wrap="square" rtlCol="0" anchor="ctr"/>
-          <a:lstStyle/>
-          <a:p>
-            <a:pPr algn="ctr" indent="0" marL="0">
-              <a:buNone/>
-            </a:pPr>
-            <a:r>
-              <a:rPr lang="en-US" sz="1200" b="1" dirty="0">
-                <a:solidFill>
-                  <a:srgbClr val="FFFFFF"/>
-                </a:solidFill>
-              </a:rPr>
-              <a:t>✓</a:t>
-            </a:r>
-            <a:endParaRPr lang="en-US" sz="1200" dirty="0"/>
-          </a:p>
-        </p:txBody>
-      </p:sp>
-      <p:sp>
-        <p:nvSpPr>
-          <p:cNvPr id="20" name="Text 18"/>
-          <p:cNvSpPr/>
-          <p:nvPr/>
-        </p:nvSpPr>
-        <p:spPr>
-          <a:xfrm>
-            <a:off x="749808" y="4050792"/>
-            <a:ext cx="5303520" cy="347472"/>
-          </a:xfrm>
-          <a:prstGeom prst="rect">
-            <a:avLst/>
-          </a:prstGeom>
-          <a:noFill/>
-          <a:ln/>
-        </p:spPr>
-        <p:txBody>
-          <a:bodyPr wrap="square" lIns="0" tIns="0" rIns="0" bIns="0" rtlCol="0" anchor="ctr"/>
-          <a:lstStyle/>
-          <a:p>
-            <a:pPr indent="0" marL="0">
-              <a:buNone/>
-            </a:pPr>
-            <a:r>
-              <a:rPr lang="en-US" sz="1200" dirty="0">
-                <a:solidFill>
-                  <a:srgbClr val="FFFFFF"/>
-                </a:solidFill>
-                <a:latin typeface="Calibri" pitchFamily="34" charset="0"/>
-                <a:ea typeface="Calibri" pitchFamily="34" charset="-122"/>
-                <a:cs typeface="Calibri" pitchFamily="34" charset="-120"/>
-              </a:rPr>
-              <a:t>Modelo ML entrenado — artefactos en /models</a:t>
-            </a:r>
-            <a:endParaRPr lang="en-US" sz="1200" dirty="0"/>
-          </a:p>
-        </p:txBody>
-      </p:sp>
-      <p:sp>
-        <p:nvSpPr>
           <p:cNvPr id="21" name="Shape 19"/>
           <p:cNvSpPr/>
           <p:nvPr/>
@@ -3040,7 +2415,7 @@
           <a:bodyPr wrap="square" rtlCol="0" anchor="ctr"/>
           <a:lstStyle/>
           <a:p>
-            <a:pPr algn="ctr" indent="0" marL="0">
+            <a:pPr marL="0" indent="0" algn="ctr">
               <a:buNone/>
             </a:pPr>
             <a:r>
@@ -3074,6 +2449,7 @@
         <a:solidFill>
           <a:srgbClr val="FFFFFF"/>
         </a:solidFill>
+        <a:effectLst/>
       </p:bgPr>
     </p:bg>
     <p:spTree>
@@ -3136,7 +2512,7 @@
           <a:bodyPr wrap="square" lIns="0" tIns="0" rIns="0" bIns="0" rtlCol="0" anchor="ctr"/>
           <a:lstStyle/>
           <a:p>
-            <a:pPr indent="0" marL="0">
+            <a:pPr marL="0" indent="0">
               <a:buNone/>
             </a:pPr>
             <a:r>
@@ -3175,7 +2551,7 @@
           <a:bodyPr wrap="square" lIns="0" tIns="0" rIns="0" bIns="0" rtlCol="0" anchor="ctr"/>
           <a:lstStyle/>
           <a:p>
-            <a:pPr indent="0" marL="0">
+            <a:pPr marL="0" indent="0">
               <a:buNone/>
             </a:pPr>
             <a:r>
@@ -3240,7 +2616,7 @@
             <a:prstDash val="solid"/>
           </a:ln>
           <a:effectLst>
-            <a:outerShdw sx="100000" sy="100000" kx="0" ky="0" algn="bl" rotWithShape="0" blurRad="101600" dist="38100" dir="8100000">
+            <a:outerShdw blurRad="101600" dist="38100" dir="8100000" algn="bl" rotWithShape="0">
               <a:srgbClr val="000000">
                 <a:alpha val="12000"/>
               </a:srgbClr>
@@ -3269,7 +2645,7 @@
           <a:bodyPr wrap="square" rtlCol="0" anchor="ctr"/>
           <a:lstStyle/>
           <a:p>
-            <a:pPr algn="ctr" indent="0" marL="0">
+            <a:pPr marL="0" indent="0" algn="ctr">
               <a:buNone/>
             </a:pPr>
             <a:r>
@@ -3305,7 +2681,7 @@
           <a:bodyPr wrap="square" lIns="0" tIns="0" rIns="0" bIns="0" rtlCol="0" anchor="ctr"/>
           <a:lstStyle/>
           <a:p>
-            <a:pPr indent="0" marL="0">
+            <a:pPr marL="0" indent="0">
               <a:buNone/>
             </a:pPr>
             <a:r>
@@ -3344,7 +2720,7 @@
           <a:bodyPr wrap="square" lIns="0" tIns="0" rIns="0" bIns="0" rtlCol="0" anchor="ctr"/>
           <a:lstStyle/>
           <a:p>
-            <a:pPr indent="0" marL="0">
+            <a:pPr marL="0" indent="0">
               <a:buNone/>
             </a:pPr>
             <a:r>
@@ -3386,7 +2762,7 @@
             <a:prstDash val="solid"/>
           </a:ln>
           <a:effectLst>
-            <a:outerShdw sx="100000" sy="100000" kx="0" ky="0" algn="bl" rotWithShape="0" blurRad="101600" dist="38100" dir="8100000">
+            <a:outerShdw blurRad="101600" dist="38100" dir="8100000" algn="bl" rotWithShape="0">
               <a:srgbClr val="000000">
                 <a:alpha val="12000"/>
               </a:srgbClr>
@@ -3415,7 +2791,7 @@
           <a:bodyPr wrap="square" rtlCol="0" anchor="ctr"/>
           <a:lstStyle/>
           <a:p>
-            <a:pPr algn="ctr" indent="0" marL="0">
+            <a:pPr marL="0" indent="0" algn="ctr">
               <a:buNone/>
             </a:pPr>
             <a:r>
@@ -3451,7 +2827,7 @@
           <a:bodyPr wrap="square" lIns="0" tIns="0" rIns="0" bIns="0" rtlCol="0" anchor="ctr"/>
           <a:lstStyle/>
           <a:p>
-            <a:pPr indent="0" marL="0">
+            <a:pPr marL="0" indent="0">
               <a:buNone/>
             </a:pPr>
             <a:r>
@@ -3490,7 +2866,7 @@
           <a:bodyPr wrap="square" lIns="0" tIns="0" rIns="0" bIns="0" rtlCol="0" anchor="ctr"/>
           <a:lstStyle/>
           <a:p>
-            <a:pPr indent="0" marL="0">
+            <a:pPr marL="0" indent="0">
               <a:buNone/>
             </a:pPr>
             <a:r>
@@ -3532,7 +2908,7 @@
             <a:prstDash val="solid"/>
           </a:ln>
           <a:effectLst>
-            <a:outerShdw sx="100000" sy="100000" kx="0" ky="0" algn="bl" rotWithShape="0" blurRad="101600" dist="38100" dir="8100000">
+            <a:outerShdw blurRad="101600" dist="38100" dir="8100000" algn="bl" rotWithShape="0">
               <a:srgbClr val="000000">
                 <a:alpha val="12000"/>
               </a:srgbClr>
@@ -3561,7 +2937,7 @@
           <a:bodyPr wrap="square" rtlCol="0" anchor="ctr"/>
           <a:lstStyle/>
           <a:p>
-            <a:pPr algn="ctr" indent="0" marL="0">
+            <a:pPr marL="0" indent="0" algn="ctr">
               <a:buNone/>
             </a:pPr>
             <a:r>
@@ -3597,7 +2973,7 @@
           <a:bodyPr wrap="square" lIns="0" tIns="0" rIns="0" bIns="0" rtlCol="0" anchor="ctr"/>
           <a:lstStyle/>
           <a:p>
-            <a:pPr indent="0" marL="0">
+            <a:pPr marL="0" indent="0">
               <a:buNone/>
             </a:pPr>
             <a:r>
@@ -3636,7 +3012,7 @@
           <a:bodyPr wrap="square" lIns="0" tIns="0" rIns="0" bIns="0" rtlCol="0" anchor="ctr"/>
           <a:lstStyle/>
           <a:p>
-            <a:pPr indent="0" marL="0">
+            <a:pPr marL="0" indent="0">
               <a:buNone/>
             </a:pPr>
             <a:r>
@@ -3678,7 +3054,7 @@
             <a:prstDash val="solid"/>
           </a:ln>
           <a:effectLst>
-            <a:outerShdw sx="100000" sy="100000" kx="0" ky="0" algn="bl" rotWithShape="0" blurRad="101600" dist="38100" dir="8100000">
+            <a:outerShdw blurRad="101600" dist="38100" dir="8100000" algn="bl" rotWithShape="0">
               <a:srgbClr val="000000">
                 <a:alpha val="12000"/>
               </a:srgbClr>
@@ -3707,7 +3083,7 @@
           <a:bodyPr wrap="square" rtlCol="0" anchor="ctr"/>
           <a:lstStyle/>
           <a:p>
-            <a:pPr algn="ctr" indent="0" marL="0">
+            <a:pPr marL="0" indent="0" algn="ctr">
               <a:buNone/>
             </a:pPr>
             <a:r>
@@ -3743,7 +3119,7 @@
           <a:bodyPr wrap="square" lIns="0" tIns="0" rIns="0" bIns="0" rtlCol="0" anchor="ctr"/>
           <a:lstStyle/>
           <a:p>
-            <a:pPr indent="0" marL="0">
+            <a:pPr marL="0" indent="0">
               <a:buNone/>
             </a:pPr>
             <a:r>
@@ -3782,7 +3158,7 @@
           <a:bodyPr wrap="square" lIns="0" tIns="0" rIns="0" bIns="0" rtlCol="0" anchor="ctr"/>
           <a:lstStyle/>
           <a:p>
-            <a:pPr indent="0" marL="0">
+            <a:pPr marL="0" indent="0">
               <a:buNone/>
             </a:pPr>
             <a:r>
@@ -3846,7 +3222,7 @@
           <a:bodyPr wrap="square" rtlCol="0" anchor="ctr"/>
           <a:lstStyle/>
           <a:p>
-            <a:pPr algn="ctr" indent="0" marL="0">
+            <a:pPr marL="0" indent="0" algn="ctr">
               <a:buNone/>
             </a:pPr>
             <a:r>
@@ -3880,6 +3256,7 @@
         <a:solidFill>
           <a:srgbClr val="FFFFFF"/>
         </a:solidFill>
+        <a:effectLst/>
       </p:bgPr>
     </p:bg>
     <p:spTree>
@@ -3942,7 +3319,7 @@
           <a:bodyPr wrap="square" lIns="0" tIns="0" rIns="0" bIns="0" rtlCol="0" anchor="ctr"/>
           <a:lstStyle/>
           <a:p>
-            <a:pPr indent="0" marL="0">
+            <a:pPr marL="0" indent="0">
               <a:buNone/>
             </a:pPr>
             <a:r>
@@ -3981,7 +3358,7 @@
           <a:bodyPr wrap="square" lIns="0" tIns="0" rIns="0" bIns="0" rtlCol="0" anchor="ctr"/>
           <a:lstStyle/>
           <a:p>
-            <a:pPr indent="0" marL="0">
+            <a:pPr marL="0" indent="0">
               <a:buNone/>
             </a:pPr>
             <a:r>
@@ -4046,7 +3423,7 @@
             <a:prstDash val="solid"/>
           </a:ln>
           <a:effectLst>
-            <a:outerShdw sx="100000" sy="100000" kx="0" ky="0" algn="bl" rotWithShape="0" blurRad="101600" dist="38100" dir="8100000">
+            <a:outerShdw blurRad="101600" dist="38100" dir="8100000" algn="bl" rotWithShape="0">
               <a:srgbClr val="000000">
                 <a:alpha val="12000"/>
               </a:srgbClr>
@@ -4100,7 +3477,7 @@
           <a:bodyPr wrap="square" rtlCol="0" anchor="ctr"/>
           <a:lstStyle/>
           <a:p>
-            <a:pPr algn="ctr" indent="0" marL="0">
+            <a:pPr marL="0" indent="0" algn="ctr">
               <a:buNone/>
             </a:pPr>
             <a:r>
@@ -4136,7 +3513,7 @@
           <a:bodyPr wrap="square" lIns="0" tIns="0" rIns="0" bIns="0" rtlCol="0" anchor="ctr"/>
           <a:lstStyle/>
           <a:p>
-            <a:pPr algn="ctr" indent="0" marL="0">
+            <a:pPr marL="0" indent="0" algn="ctr">
               <a:buNone/>
             </a:pPr>
             <a:r>
@@ -4175,7 +3552,7 @@
           <a:bodyPr wrap="square" lIns="0" tIns="0" rIns="0" bIns="0" rtlCol="0" anchor="ctr"/>
           <a:lstStyle/>
           <a:p>
-            <a:pPr algn="ctr" indent="0" marL="0">
+            <a:pPr marL="0" indent="0" algn="ctr">
               <a:buNone/>
             </a:pPr>
             <a:r>
@@ -4214,7 +3591,7 @@
           <a:bodyPr wrap="square" lIns="0" tIns="0" rIns="0" bIns="0" rtlCol="0" anchor="ctr"/>
           <a:lstStyle/>
           <a:p>
-            <a:pPr algn="ctr" indent="0" marL="0">
+            <a:pPr marL="0" indent="0" algn="ctr">
               <a:buNone/>
             </a:pPr>
             <a:r>
@@ -4256,7 +3633,7 @@
             <a:prstDash val="solid"/>
           </a:ln>
           <a:effectLst>
-            <a:outerShdw sx="100000" sy="100000" kx="0" ky="0" algn="bl" rotWithShape="0" blurRad="101600" dist="38100" dir="8100000">
+            <a:outerShdw blurRad="101600" dist="38100" dir="8100000" algn="bl" rotWithShape="0">
               <a:srgbClr val="000000">
                 <a:alpha val="12000"/>
               </a:srgbClr>
@@ -4310,7 +3687,7 @@
           <a:bodyPr wrap="square" rtlCol="0" anchor="ctr"/>
           <a:lstStyle/>
           <a:p>
-            <a:pPr algn="ctr" indent="0" marL="0">
+            <a:pPr marL="0" indent="0" algn="ctr">
               <a:buNone/>
             </a:pPr>
             <a:r>
@@ -4346,7 +3723,7 @@
           <a:bodyPr wrap="square" lIns="0" tIns="0" rIns="0" bIns="0" rtlCol="0" anchor="ctr"/>
           <a:lstStyle/>
           <a:p>
-            <a:pPr algn="ctr" indent="0" marL="0">
+            <a:pPr marL="0" indent="0" algn="ctr">
               <a:buNone/>
             </a:pPr>
             <a:r>
@@ -4385,7 +3762,7 @@
           <a:bodyPr wrap="square" lIns="0" tIns="0" rIns="0" bIns="0" rtlCol="0" anchor="ctr"/>
           <a:lstStyle/>
           <a:p>
-            <a:pPr algn="ctr" indent="0" marL="0">
+            <a:pPr marL="0" indent="0" algn="ctr">
               <a:buNone/>
             </a:pPr>
             <a:r>
@@ -4424,7 +3801,7 @@
           <a:bodyPr wrap="square" lIns="0" tIns="0" rIns="0" bIns="0" rtlCol="0" anchor="ctr"/>
           <a:lstStyle/>
           <a:p>
-            <a:pPr algn="ctr" indent="0" marL="0">
+            <a:pPr marL="0" indent="0" algn="ctr">
               <a:buNone/>
             </a:pPr>
             <a:r>
@@ -4466,7 +3843,7 @@
             <a:prstDash val="solid"/>
           </a:ln>
           <a:effectLst>
-            <a:outerShdw sx="100000" sy="100000" kx="0" ky="0" algn="bl" rotWithShape="0" blurRad="101600" dist="38100" dir="8100000">
+            <a:outerShdw blurRad="101600" dist="38100" dir="8100000" algn="bl" rotWithShape="0">
               <a:srgbClr val="000000">
                 <a:alpha val="12000"/>
               </a:srgbClr>
@@ -4520,7 +3897,7 @@
           <a:bodyPr wrap="square" rtlCol="0" anchor="ctr"/>
           <a:lstStyle/>
           <a:p>
-            <a:pPr algn="ctr" indent="0" marL="0">
+            <a:pPr marL="0" indent="0" algn="ctr">
               <a:buNone/>
             </a:pPr>
             <a:r>
@@ -4556,7 +3933,7 @@
           <a:bodyPr wrap="square" lIns="0" tIns="0" rIns="0" bIns="0" rtlCol="0" anchor="ctr"/>
           <a:lstStyle/>
           <a:p>
-            <a:pPr algn="ctr" indent="0" marL="0">
+            <a:pPr marL="0" indent="0" algn="ctr">
               <a:buNone/>
             </a:pPr>
             <a:r>
@@ -4595,7 +3972,7 @@
           <a:bodyPr wrap="square" lIns="0" tIns="0" rIns="0" bIns="0" rtlCol="0" anchor="ctr"/>
           <a:lstStyle/>
           <a:p>
-            <a:pPr algn="ctr" indent="0" marL="0">
+            <a:pPr marL="0" indent="0" algn="ctr">
               <a:buNone/>
             </a:pPr>
             <a:r>
@@ -4634,7 +4011,7 @@
           <a:bodyPr wrap="square" lIns="0" tIns="0" rIns="0" bIns="0" rtlCol="0" anchor="ctr"/>
           <a:lstStyle/>
           <a:p>
-            <a:pPr algn="ctr" indent="0" marL="0">
+            <a:pPr marL="0" indent="0" algn="ctr">
               <a:buNone/>
             </a:pPr>
             <a:r>
@@ -4676,7 +4053,7 @@
             <a:prstDash val="solid"/>
           </a:ln>
           <a:effectLst>
-            <a:outerShdw sx="100000" sy="100000" kx="0" ky="0" algn="bl" rotWithShape="0" blurRad="101600" dist="38100" dir="8100000">
+            <a:outerShdw blurRad="101600" dist="38100" dir="8100000" algn="bl" rotWithShape="0">
               <a:srgbClr val="000000">
                 <a:alpha val="12000"/>
               </a:srgbClr>
@@ -4730,7 +4107,7 @@
           <a:bodyPr wrap="square" rtlCol="0" anchor="ctr"/>
           <a:lstStyle/>
           <a:p>
-            <a:pPr algn="ctr" indent="0" marL="0">
+            <a:pPr marL="0" indent="0" algn="ctr">
               <a:buNone/>
             </a:pPr>
             <a:r>
@@ -4766,7 +4143,7 @@
           <a:bodyPr wrap="square" lIns="0" tIns="0" rIns="0" bIns="0" rtlCol="0" anchor="ctr"/>
           <a:lstStyle/>
           <a:p>
-            <a:pPr algn="ctr" indent="0" marL="0">
+            <a:pPr marL="0" indent="0" algn="ctr">
               <a:buNone/>
             </a:pPr>
             <a:r>
@@ -4805,7 +4182,7 @@
           <a:bodyPr wrap="square" lIns="0" tIns="0" rIns="0" bIns="0" rtlCol="0" anchor="ctr"/>
           <a:lstStyle/>
           <a:p>
-            <a:pPr algn="ctr" indent="0" marL="0">
+            <a:pPr marL="0" indent="0" algn="ctr">
               <a:buNone/>
             </a:pPr>
             <a:r>
@@ -4844,7 +4221,7 @@
           <a:bodyPr wrap="square" lIns="0" tIns="0" rIns="0" bIns="0" rtlCol="0" anchor="ctr"/>
           <a:lstStyle/>
           <a:p>
-            <a:pPr algn="ctr" indent="0" marL="0">
+            <a:pPr marL="0" indent="0" algn="ctr">
               <a:buNone/>
             </a:pPr>
             <a:r>
@@ -4908,7 +4285,7 @@
           <a:bodyPr wrap="square" rtlCol="0" anchor="ctr"/>
           <a:lstStyle/>
           <a:p>
-            <a:pPr algn="ctr" indent="0" marL="0">
+            <a:pPr marL="0" indent="0" algn="ctr">
               <a:buNone/>
             </a:pPr>
             <a:r>
@@ -4947,7 +4324,7 @@
           <a:bodyPr wrap="square" rtlCol="0" anchor="ctr"/>
           <a:lstStyle/>
           <a:p>
-            <a:pPr algn="ctr" indent="0" marL="0">
+            <a:pPr marL="0" indent="0" algn="ctr">
               <a:buNone/>
             </a:pPr>
             <a:r>
@@ -4981,6 +4358,7 @@
         <a:solidFill>
           <a:srgbClr val="FFFFFF"/>
         </a:solidFill>
+        <a:effectLst/>
       </p:bgPr>
     </p:bg>
     <p:spTree>
@@ -5043,7 +4421,7 @@
           <a:bodyPr wrap="square" lIns="0" tIns="0" rIns="0" bIns="0" rtlCol="0" anchor="ctr"/>
           <a:lstStyle/>
           <a:p>
-            <a:pPr indent="0" marL="0">
+            <a:pPr marL="0" indent="0">
               <a:buNone/>
             </a:pPr>
             <a:r>
@@ -5082,7 +4460,7 @@
           <a:bodyPr wrap="square" lIns="0" tIns="0" rIns="0" bIns="0" rtlCol="0" anchor="ctr"/>
           <a:lstStyle/>
           <a:p>
-            <a:pPr indent="0" marL="0">
+            <a:pPr marL="0" indent="0">
               <a:buNone/>
             </a:pPr>
             <a:r>
@@ -5147,7 +4525,7 @@
             <a:prstDash val="solid"/>
           </a:ln>
           <a:effectLst>
-            <a:outerShdw sx="100000" sy="100000" kx="0" ky="0" algn="bl" rotWithShape="0" blurRad="101600" dist="38100" dir="8100000">
+            <a:outerShdw blurRad="101600" dist="38100" dir="8100000" algn="bl" rotWithShape="0">
               <a:srgbClr val="000000">
                 <a:alpha val="12000"/>
               </a:srgbClr>
@@ -5176,7 +4554,7 @@
           <a:bodyPr wrap="square" rtlCol="0" anchor="ctr"/>
           <a:lstStyle/>
           <a:p>
-            <a:pPr algn="ctr" indent="0" marL="0">
+            <a:pPr marL="0" indent="0" algn="ctr">
               <a:buNone/>
             </a:pPr>
             <a:r>
@@ -5193,7 +4571,7 @@
             <a:endParaRPr lang="en-US" sz="1100" dirty="0"/>
           </a:p>
           <a:p>
-            <a:pPr algn="ctr" indent="0" marL="0">
+            <a:pPr marL="0" indent="0" algn="ctr">
               <a:buNone/>
             </a:pPr>
             <a:r>
@@ -5210,7 +4588,7 @@
             <a:endParaRPr lang="en-US" sz="1100" dirty="0"/>
           </a:p>
           <a:p>
-            <a:pPr algn="ctr" indent="0" marL="0">
+            <a:pPr marL="0" indent="0" algn="ctr">
               <a:buNone/>
             </a:pPr>
             <a:r>
@@ -5272,7 +4650,7 @@
           <a:bodyPr wrap="square" lIns="0" tIns="0" rIns="0" bIns="0" rtlCol="0" anchor="ctr"/>
           <a:lstStyle/>
           <a:p>
-            <a:pPr indent="0" marL="0">
+            <a:pPr marL="0" indent="0">
               <a:buNone/>
             </a:pPr>
             <a:r>
@@ -5311,7 +4689,7 @@
             <a:prstDash val="solid"/>
           </a:ln>
           <a:effectLst>
-            <a:outerShdw sx="100000" sy="100000" kx="0" ky="0" algn="bl" rotWithShape="0" blurRad="101600" dist="38100" dir="8100000">
+            <a:outerShdw blurRad="101600" dist="38100" dir="8100000" algn="bl" rotWithShape="0">
               <a:srgbClr val="000000">
                 <a:alpha val="12000"/>
               </a:srgbClr>
@@ -5340,7 +4718,7 @@
           <a:bodyPr wrap="square" rtlCol="0" anchor="ctr"/>
           <a:lstStyle/>
           <a:p>
-            <a:pPr algn="ctr" indent="0" marL="0">
+            <a:pPr marL="0" indent="0" algn="ctr">
               <a:buNone/>
             </a:pPr>
             <a:r>
@@ -5357,7 +4735,7 @@
             <a:endParaRPr lang="en-US" sz="1100" dirty="0"/>
           </a:p>
           <a:p>
-            <a:pPr algn="ctr" indent="0" marL="0">
+            <a:pPr marL="0" indent="0" algn="ctr">
               <a:buNone/>
             </a:pPr>
             <a:r>
@@ -5419,7 +4797,7 @@
           <a:bodyPr wrap="square" lIns="0" tIns="0" rIns="0" bIns="0" rtlCol="0" anchor="ctr"/>
           <a:lstStyle/>
           <a:p>
-            <a:pPr indent="0" marL="0">
+            <a:pPr marL="0" indent="0">
               <a:buNone/>
             </a:pPr>
             <a:r>
@@ -5458,7 +4836,7 @@
             <a:prstDash val="solid"/>
           </a:ln>
           <a:effectLst>
-            <a:outerShdw sx="100000" sy="100000" kx="0" ky="0" algn="bl" rotWithShape="0" blurRad="101600" dist="38100" dir="8100000">
+            <a:outerShdw blurRad="101600" dist="38100" dir="8100000" algn="bl" rotWithShape="0">
               <a:srgbClr val="000000">
                 <a:alpha val="12000"/>
               </a:srgbClr>
@@ -5487,7 +4865,7 @@
           <a:bodyPr wrap="square" rtlCol="0" anchor="ctr"/>
           <a:lstStyle/>
           <a:p>
-            <a:pPr algn="ctr" indent="0" marL="0">
+            <a:pPr marL="0" indent="0" algn="ctr">
               <a:buNone/>
             </a:pPr>
             <a:r>
@@ -5504,7 +4882,7 @@
             <a:endParaRPr lang="en-US" sz="1100" dirty="0"/>
           </a:p>
           <a:p>
-            <a:pPr algn="ctr" indent="0" marL="0">
+            <a:pPr marL="0" indent="0" algn="ctr">
               <a:buNone/>
             </a:pPr>
             <a:r>
@@ -5566,7 +4944,7 @@
           <a:bodyPr wrap="square" lIns="0" tIns="0" rIns="0" bIns="0" rtlCol="0" anchor="ctr"/>
           <a:lstStyle/>
           <a:p>
-            <a:pPr indent="0" marL="0">
+            <a:pPr marL="0" indent="0">
               <a:buNone/>
             </a:pPr>
             <a:r>
@@ -5605,7 +4983,7 @@
             <a:prstDash val="solid"/>
           </a:ln>
           <a:effectLst>
-            <a:outerShdw sx="100000" sy="100000" kx="0" ky="0" algn="bl" rotWithShape="0" blurRad="101600" dist="38100" dir="8100000">
+            <a:outerShdw blurRad="101600" dist="38100" dir="8100000" algn="bl" rotWithShape="0">
               <a:srgbClr val="000000">
                 <a:alpha val="12000"/>
               </a:srgbClr>
@@ -5634,7 +5012,7 @@
           <a:bodyPr wrap="square" rtlCol="0" anchor="ctr"/>
           <a:lstStyle/>
           <a:p>
-            <a:pPr algn="ctr" indent="0" marL="0">
+            <a:pPr marL="0" indent="0" algn="ctr">
               <a:buNone/>
             </a:pPr>
             <a:r>
@@ -5651,7 +5029,7 @@
             <a:endParaRPr lang="en-US" sz="1100" dirty="0"/>
           </a:p>
           <a:p>
-            <a:pPr algn="ctr" indent="0" marL="0">
+            <a:pPr marL="0" indent="0" algn="ctr">
               <a:buNone/>
             </a:pPr>
             <a:r>
@@ -5713,7 +5091,7 @@
           <a:bodyPr wrap="square" lIns="0" tIns="0" rIns="0" bIns="0" rtlCol="0" anchor="ctr"/>
           <a:lstStyle/>
           <a:p>
-            <a:pPr indent="0" marL="0">
+            <a:pPr marL="0" indent="0">
               <a:buNone/>
             </a:pPr>
             <a:r>
@@ -5752,7 +5130,7 @@
             <a:prstDash val="solid"/>
           </a:ln>
           <a:effectLst>
-            <a:outerShdw sx="100000" sy="100000" kx="0" ky="0" algn="bl" rotWithShape="0" blurRad="101600" dist="38100" dir="8100000">
+            <a:outerShdw blurRad="101600" dist="38100" dir="8100000" algn="bl" rotWithShape="0">
               <a:srgbClr val="000000">
                 <a:alpha val="12000"/>
               </a:srgbClr>
@@ -5781,7 +5159,7 @@
           <a:bodyPr wrap="square" rtlCol="0" anchor="ctr"/>
           <a:lstStyle/>
           <a:p>
-            <a:pPr algn="ctr" indent="0" marL="0">
+            <a:pPr marL="0" indent="0" algn="ctr">
               <a:buNone/>
             </a:pPr>
             <a:r>
@@ -5798,7 +5176,7 @@
             <a:endParaRPr lang="en-US" sz="1100" dirty="0"/>
           </a:p>
           <a:p>
-            <a:pPr algn="ctr" indent="0" marL="0">
+            <a:pPr marL="0" indent="0" algn="ctr">
               <a:buNone/>
             </a:pPr>
             <a:r>
@@ -5837,11 +5215,11 @@
           <a:bodyPr wrap="square" rtlCol="0" anchor="ctr"/>
           <a:lstStyle/>
           <a:p>
-            <a:pPr indent="0" marL="0">
-              <a:buNone/>
-            </a:pPr>
-            <a:r>
-              <a:rPr lang="en-US" sz="1100" b="1" spc="300" kern="0" dirty="0">
+            <a:pPr marL="0" indent="0">
+              <a:buNone/>
+            </a:pPr>
+            <a:r>
+              <a:rPr lang="en-US" sz="1100" b="1" kern="0" spc="300" dirty="0">
                 <a:solidFill>
                   <a:srgbClr val="94A3B8"/>
                 </a:solidFill>
@@ -5901,7 +5279,7 @@
           <a:bodyPr wrap="square" lIns="0" tIns="0" rIns="0" bIns="0" rtlCol="0" anchor="ctr"/>
           <a:lstStyle/>
           <a:p>
-            <a:pPr algn="ctr" indent="0" marL="0">
+            <a:pPr marL="0" indent="0" algn="ctr">
               <a:buNone/>
             </a:pPr>
             <a:r>
@@ -5940,7 +5318,7 @@
           <a:bodyPr wrap="square" lIns="0" tIns="0" rIns="0" bIns="0" rtlCol="0" anchor="ctr"/>
           <a:lstStyle/>
           <a:p>
-            <a:pPr algn="ctr" indent="0" marL="0">
+            <a:pPr marL="0" indent="0" algn="ctr">
               <a:buNone/>
             </a:pPr>
             <a:r>
@@ -6004,7 +5382,7 @@
           <a:bodyPr wrap="square" lIns="0" tIns="0" rIns="0" bIns="0" rtlCol="0" anchor="ctr"/>
           <a:lstStyle/>
           <a:p>
-            <a:pPr algn="ctr" indent="0" marL="0">
+            <a:pPr marL="0" indent="0" algn="ctr">
               <a:buNone/>
             </a:pPr>
             <a:r>
@@ -6043,7 +5421,7 @@
           <a:bodyPr wrap="square" lIns="0" tIns="0" rIns="0" bIns="0" rtlCol="0" anchor="ctr"/>
           <a:lstStyle/>
           <a:p>
-            <a:pPr algn="ctr" indent="0" marL="0">
+            <a:pPr marL="0" indent="0" algn="ctr">
               <a:buNone/>
             </a:pPr>
             <a:r>
@@ -6107,7 +5485,7 @@
           <a:bodyPr wrap="square" lIns="0" tIns="0" rIns="0" bIns="0" rtlCol="0" anchor="ctr"/>
           <a:lstStyle/>
           <a:p>
-            <a:pPr algn="ctr" indent="0" marL="0">
+            <a:pPr marL="0" indent="0" algn="ctr">
               <a:buNone/>
             </a:pPr>
             <a:r>
@@ -6146,7 +5524,7 @@
           <a:bodyPr wrap="square" lIns="0" tIns="0" rIns="0" bIns="0" rtlCol="0" anchor="ctr"/>
           <a:lstStyle/>
           <a:p>
-            <a:pPr algn="ctr" indent="0" marL="0">
+            <a:pPr marL="0" indent="0" algn="ctr">
               <a:buNone/>
             </a:pPr>
             <a:r>
@@ -6210,7 +5588,7 @@
           <a:bodyPr wrap="square" lIns="0" tIns="0" rIns="0" bIns="0" rtlCol="0" anchor="ctr"/>
           <a:lstStyle/>
           <a:p>
-            <a:pPr algn="ctr" indent="0" marL="0">
+            <a:pPr marL="0" indent="0" algn="ctr">
               <a:buNone/>
             </a:pPr>
             <a:r>
@@ -6249,7 +5627,7 @@
           <a:bodyPr wrap="square" lIns="0" tIns="0" rIns="0" bIns="0" rtlCol="0" anchor="ctr"/>
           <a:lstStyle/>
           <a:p>
-            <a:pPr algn="ctr" indent="0" marL="0">
+            <a:pPr marL="0" indent="0" algn="ctr">
               <a:buNone/>
             </a:pPr>
             <a:r>
@@ -6313,7 +5691,7 @@
           <a:bodyPr wrap="square" lIns="0" tIns="0" rIns="0" bIns="0" rtlCol="0" anchor="ctr"/>
           <a:lstStyle/>
           <a:p>
-            <a:pPr algn="ctr" indent="0" marL="0">
+            <a:pPr marL="0" indent="0" algn="ctr">
               <a:buNone/>
             </a:pPr>
             <a:r>
@@ -6352,7 +5730,7 @@
           <a:bodyPr wrap="square" lIns="0" tIns="0" rIns="0" bIns="0" rtlCol="0" anchor="ctr"/>
           <a:lstStyle/>
           <a:p>
-            <a:pPr algn="ctr" indent="0" marL="0">
+            <a:pPr marL="0" indent="0" algn="ctr">
               <a:buNone/>
             </a:pPr>
             <a:r>
@@ -6416,7 +5794,7 @@
           <a:bodyPr wrap="square" lIns="0" tIns="0" rIns="0" bIns="0" rtlCol="0" anchor="ctr"/>
           <a:lstStyle/>
           <a:p>
-            <a:pPr algn="ctr" indent="0" marL="0">
+            <a:pPr marL="0" indent="0" algn="ctr">
               <a:buNone/>
             </a:pPr>
             <a:r>
@@ -6455,7 +5833,7 @@
           <a:bodyPr wrap="square" lIns="0" tIns="0" rIns="0" bIns="0" rtlCol="0" anchor="ctr"/>
           <a:lstStyle/>
           <a:p>
-            <a:pPr algn="ctr" indent="0" marL="0">
+            <a:pPr marL="0" indent="0" algn="ctr">
               <a:buNone/>
             </a:pPr>
             <a:r>
@@ -6519,7 +5897,7 @@
           <a:bodyPr wrap="square" rtlCol="0" anchor="ctr"/>
           <a:lstStyle/>
           <a:p>
-            <a:pPr algn="ctr" indent="0" marL="0">
+            <a:pPr marL="0" indent="0" algn="ctr">
               <a:buNone/>
             </a:pPr>
             <a:r>
@@ -6553,6 +5931,7 @@
         <a:solidFill>
           <a:srgbClr val="FFFFFF"/>
         </a:solidFill>
+        <a:effectLst/>
       </p:bgPr>
     </p:bg>
     <p:spTree>
@@ -6615,7 +5994,7 @@
           <a:bodyPr wrap="square" lIns="0" tIns="0" rIns="0" bIns="0" rtlCol="0" anchor="ctr"/>
           <a:lstStyle/>
           <a:p>
-            <a:pPr indent="0" marL="0">
+            <a:pPr marL="0" indent="0">
               <a:buNone/>
             </a:pPr>
             <a:r>
@@ -6654,7 +6033,7 @@
           <a:bodyPr wrap="square" lIns="0" tIns="0" rIns="0" bIns="0" rtlCol="0" anchor="ctr"/>
           <a:lstStyle/>
           <a:p>
-            <a:pPr indent="0" marL="0">
+            <a:pPr marL="0" indent="0">
               <a:buNone/>
             </a:pPr>
             <a:r>
@@ -6719,7 +6098,7 @@
             <a:prstDash val="solid"/>
           </a:ln>
           <a:effectLst>
-            <a:outerShdw sx="100000" sy="100000" kx="0" ky="0" algn="bl" rotWithShape="0" blurRad="101600" dist="38100" dir="8100000">
+            <a:outerShdw blurRad="101600" dist="38100" dir="8100000" algn="bl" rotWithShape="0">
               <a:srgbClr val="000000">
                 <a:alpha val="12000"/>
               </a:srgbClr>
@@ -6798,7 +6177,7 @@
           <a:bodyPr wrap="square" rtlCol="0" anchor="ctr"/>
           <a:lstStyle/>
           <a:p>
-            <a:pPr algn="ctr" indent="0" marL="0">
+            <a:pPr marL="0" indent="0" algn="ctr">
               <a:buNone/>
             </a:pPr>
             <a:r>
@@ -6837,7 +6216,7 @@
           <a:bodyPr wrap="square" lIns="0" tIns="0" rIns="0" bIns="0" rtlCol="0" anchor="ctr"/>
           <a:lstStyle/>
           <a:p>
-            <a:pPr indent="0" marL="0">
+            <a:pPr marL="0" indent="0">
               <a:buNone/>
             </a:pPr>
             <a:r>
@@ -6876,7 +6255,7 @@
           <a:bodyPr wrap="square" lIns="0" tIns="0" rIns="0" bIns="0" rtlCol="0" anchor="ctr"/>
           <a:lstStyle/>
           <a:p>
-            <a:pPr indent="0" marL="0">
+            <a:pPr marL="0" indent="0">
               <a:buNone/>
             </a:pPr>
             <a:r>
@@ -6915,7 +6294,7 @@
           <a:bodyPr wrap="square" lIns="0" tIns="0" rIns="0" bIns="0" rtlCol="0" anchor="ctr"/>
           <a:lstStyle/>
           <a:p>
-            <a:pPr algn="r" indent="0" marL="0">
+            <a:pPr marL="0" indent="0" algn="r">
               <a:buNone/>
             </a:pPr>
             <a:r>
@@ -6954,7 +6333,7 @@
           <a:bodyPr wrap="square" lIns="0" tIns="0" rIns="0" bIns="0" rtlCol="0" anchor="ctr"/>
           <a:lstStyle/>
           <a:p>
-            <a:pPr algn="r" indent="0" marL="0">
+            <a:pPr marL="0" indent="0" algn="r">
               <a:buNone/>
             </a:pPr>
             <a:r>
@@ -7021,7 +6400,7 @@
             <a:prstDash val="solid"/>
           </a:ln>
           <a:effectLst>
-            <a:outerShdw sx="100000" sy="100000" kx="0" ky="0" algn="bl" rotWithShape="0" blurRad="101600" dist="38100" dir="8100000">
+            <a:outerShdw blurRad="101600" dist="38100" dir="8100000" algn="bl" rotWithShape="0">
               <a:srgbClr val="000000">
                 <a:alpha val="12000"/>
               </a:srgbClr>
@@ -7100,7 +6479,7 @@
           <a:bodyPr wrap="square" rtlCol="0" anchor="ctr"/>
           <a:lstStyle/>
           <a:p>
-            <a:pPr algn="ctr" indent="0" marL="0">
+            <a:pPr marL="0" indent="0" algn="ctr">
               <a:buNone/>
             </a:pPr>
             <a:r>
@@ -7139,7 +6518,7 @@
           <a:bodyPr wrap="square" lIns="0" tIns="0" rIns="0" bIns="0" rtlCol="0" anchor="ctr"/>
           <a:lstStyle/>
           <a:p>
-            <a:pPr indent="0" marL="0">
+            <a:pPr marL="0" indent="0">
               <a:buNone/>
             </a:pPr>
             <a:r>
@@ -7178,7 +6557,7 @@
           <a:bodyPr wrap="square" lIns="0" tIns="0" rIns="0" bIns="0" rtlCol="0" anchor="ctr"/>
           <a:lstStyle/>
           <a:p>
-            <a:pPr indent="0" marL="0">
+            <a:pPr marL="0" indent="0">
               <a:buNone/>
             </a:pPr>
             <a:r>
@@ -7217,7 +6596,7 @@
           <a:bodyPr wrap="square" lIns="0" tIns="0" rIns="0" bIns="0" rtlCol="0" anchor="ctr"/>
           <a:lstStyle/>
           <a:p>
-            <a:pPr algn="r" indent="0" marL="0">
+            <a:pPr marL="0" indent="0" algn="r">
               <a:buNone/>
             </a:pPr>
             <a:r>
@@ -7256,7 +6635,7 @@
           <a:bodyPr wrap="square" lIns="0" tIns="0" rIns="0" bIns="0" rtlCol="0" anchor="ctr"/>
           <a:lstStyle/>
           <a:p>
-            <a:pPr algn="r" indent="0" marL="0">
+            <a:pPr marL="0" indent="0" algn="r">
               <a:buNone/>
             </a:pPr>
             <a:r>
@@ -7323,7 +6702,7 @@
             <a:prstDash val="solid"/>
           </a:ln>
           <a:effectLst>
-            <a:outerShdw sx="100000" sy="100000" kx="0" ky="0" algn="bl" rotWithShape="0" blurRad="101600" dist="38100" dir="8100000">
+            <a:outerShdw blurRad="101600" dist="38100" dir="8100000" algn="bl" rotWithShape="0">
               <a:srgbClr val="000000">
                 <a:alpha val="12000"/>
               </a:srgbClr>
@@ -7402,7 +6781,7 @@
           <a:bodyPr wrap="square" rtlCol="0" anchor="ctr"/>
           <a:lstStyle/>
           <a:p>
-            <a:pPr algn="ctr" indent="0" marL="0">
+            <a:pPr marL="0" indent="0" algn="ctr">
               <a:buNone/>
             </a:pPr>
             <a:r>
@@ -7441,7 +6820,7 @@
           <a:bodyPr wrap="square" lIns="0" tIns="0" rIns="0" bIns="0" rtlCol="0" anchor="ctr"/>
           <a:lstStyle/>
           <a:p>
-            <a:pPr indent="0" marL="0">
+            <a:pPr marL="0" indent="0">
               <a:buNone/>
             </a:pPr>
             <a:r>
@@ -7480,7 +6859,7 @@
           <a:bodyPr wrap="square" lIns="0" tIns="0" rIns="0" bIns="0" rtlCol="0" anchor="ctr"/>
           <a:lstStyle/>
           <a:p>
-            <a:pPr indent="0" marL="0">
+            <a:pPr marL="0" indent="0">
               <a:buNone/>
             </a:pPr>
             <a:r>
@@ -7519,7 +6898,7 @@
           <a:bodyPr wrap="square" lIns="0" tIns="0" rIns="0" bIns="0" rtlCol="0" anchor="ctr"/>
           <a:lstStyle/>
           <a:p>
-            <a:pPr algn="r" indent="0" marL="0">
+            <a:pPr marL="0" indent="0" algn="r">
               <a:buNone/>
             </a:pPr>
             <a:r>
@@ -7558,7 +6937,7 @@
           <a:bodyPr wrap="square" lIns="0" tIns="0" rIns="0" bIns="0" rtlCol="0" anchor="ctr"/>
           <a:lstStyle/>
           <a:p>
-            <a:pPr algn="r" indent="0" marL="0">
+            <a:pPr marL="0" indent="0" algn="r">
               <a:buNone/>
             </a:pPr>
             <a:r>
@@ -7622,11 +7001,11 @@
           <a:bodyPr wrap="square" rtlCol="0" anchor="ctr"/>
           <a:lstStyle/>
           <a:p>
-            <a:pPr indent="0" marL="0">
-              <a:buNone/>
-            </a:pPr>
-            <a:r>
-              <a:rPr lang="en-US" sz="1000" b="1" spc="200" kern="0" dirty="0">
+            <a:pPr marL="0" indent="0">
+              <a:buNone/>
+            </a:pPr>
+            <a:r>
+              <a:rPr lang="en-US" sz="1000" b="1" kern="0" spc="200" dirty="0">
                 <a:solidFill>
                   <a:srgbClr val="94A3B8"/>
                 </a:solidFill>
@@ -7686,7 +7065,7 @@
           <a:bodyPr wrap="square" lIns="0" tIns="0" rIns="0" bIns="0" rtlCol="0" anchor="ctr"/>
           <a:lstStyle/>
           <a:p>
-            <a:pPr indent="0" marL="0">
+            <a:pPr marL="0" indent="0">
               <a:buNone/>
             </a:pPr>
             <a:r>
@@ -7750,7 +7129,7 @@
           <a:bodyPr wrap="square" lIns="0" tIns="0" rIns="0" bIns="0" rtlCol="0" anchor="ctr"/>
           <a:lstStyle/>
           <a:p>
-            <a:pPr indent="0" marL="0">
+            <a:pPr marL="0" indent="0">
               <a:buNone/>
             </a:pPr>
             <a:r>
@@ -7814,7 +7193,7 @@
           <a:bodyPr wrap="square" lIns="0" tIns="0" rIns="0" bIns="0" rtlCol="0" anchor="ctr"/>
           <a:lstStyle/>
           <a:p>
-            <a:pPr indent="0" marL="0">
+            <a:pPr marL="0" indent="0">
               <a:buNone/>
             </a:pPr>
             <a:r>
@@ -7878,7 +7257,7 @@
           <a:bodyPr wrap="square" lIns="0" tIns="0" rIns="0" bIns="0" rtlCol="0" anchor="ctr"/>
           <a:lstStyle/>
           <a:p>
-            <a:pPr indent="0" marL="0">
+            <a:pPr marL="0" indent="0">
               <a:buNone/>
             </a:pPr>
             <a:r>
@@ -7912,6 +7291,7 @@
         <a:solidFill>
           <a:srgbClr val="FFFFFF"/>
         </a:solidFill>
+        <a:effectLst/>
       </p:bgPr>
     </p:bg>
     <p:spTree>
@@ -7974,7 +7354,7 @@
           <a:bodyPr wrap="square" lIns="0" tIns="0" rIns="0" bIns="0" rtlCol="0" anchor="ctr"/>
           <a:lstStyle/>
           <a:p>
-            <a:pPr indent="0" marL="0">
+            <a:pPr marL="0" indent="0">
               <a:buNone/>
             </a:pPr>
             <a:r>
@@ -8013,7 +7393,7 @@
           <a:bodyPr wrap="square" lIns="0" tIns="0" rIns="0" bIns="0" rtlCol="0" anchor="ctr"/>
           <a:lstStyle/>
           <a:p>
-            <a:pPr indent="0" marL="0">
+            <a:pPr marL="0" indent="0">
               <a:buNone/>
             </a:pPr>
             <a:r>
@@ -8078,7 +7458,7 @@
             <a:prstDash val="solid"/>
           </a:ln>
           <a:effectLst>
-            <a:outerShdw sx="100000" sy="100000" kx="0" ky="0" algn="bl" rotWithShape="0" blurRad="101600" dist="38100" dir="8100000">
+            <a:outerShdw blurRad="101600" dist="38100" dir="8100000" algn="bl" rotWithShape="0">
               <a:srgbClr val="000000">
                 <a:alpha val="12000"/>
               </a:srgbClr>
@@ -8132,7 +7512,7 @@
           <a:bodyPr wrap="square" lIns="0" tIns="0" rIns="0" bIns="0" rtlCol="0" anchor="ctr"/>
           <a:lstStyle/>
           <a:p>
-            <a:pPr algn="ctr" indent="0" marL="0">
+            <a:pPr marL="0" indent="0" algn="ctr">
               <a:buNone/>
             </a:pPr>
             <a:r>
@@ -8171,7 +7551,7 @@
           <a:bodyPr wrap="square" lIns="0" tIns="0" rIns="0" bIns="0" rtlCol="0" anchor="ctr"/>
           <a:lstStyle/>
           <a:p>
-            <a:pPr algn="ctr" indent="0" marL="0">
+            <a:pPr marL="0" indent="0" algn="ctr">
               <a:buNone/>
             </a:pPr>
             <a:r>
@@ -8213,7 +7593,7 @@
             <a:prstDash val="solid"/>
           </a:ln>
           <a:effectLst>
-            <a:outerShdw sx="100000" sy="100000" kx="0" ky="0" algn="bl" rotWithShape="0" blurRad="101600" dist="38100" dir="8100000">
+            <a:outerShdw blurRad="101600" dist="38100" dir="8100000" algn="bl" rotWithShape="0">
               <a:srgbClr val="000000">
                 <a:alpha val="12000"/>
               </a:srgbClr>
@@ -8267,7 +7647,7 @@
           <a:bodyPr wrap="square" lIns="0" tIns="0" rIns="0" bIns="0" rtlCol="0" anchor="ctr"/>
           <a:lstStyle/>
           <a:p>
-            <a:pPr algn="ctr" indent="0" marL="0">
+            <a:pPr marL="0" indent="0" algn="ctr">
               <a:buNone/>
             </a:pPr>
             <a:r>
@@ -8306,7 +7686,7 @@
           <a:bodyPr wrap="square" lIns="0" tIns="0" rIns="0" bIns="0" rtlCol="0" anchor="ctr"/>
           <a:lstStyle/>
           <a:p>
-            <a:pPr algn="ctr" indent="0" marL="0">
+            <a:pPr marL="0" indent="0" algn="ctr">
               <a:buNone/>
             </a:pPr>
             <a:r>
@@ -8348,7 +7728,7 @@
             <a:prstDash val="solid"/>
           </a:ln>
           <a:effectLst>
-            <a:outerShdw sx="100000" sy="100000" kx="0" ky="0" algn="bl" rotWithShape="0" blurRad="101600" dist="38100" dir="8100000">
+            <a:outerShdw blurRad="101600" dist="38100" dir="8100000" algn="bl" rotWithShape="0">
               <a:srgbClr val="000000">
                 <a:alpha val="12000"/>
               </a:srgbClr>
@@ -8402,7 +7782,7 @@
           <a:bodyPr wrap="square" lIns="0" tIns="0" rIns="0" bIns="0" rtlCol="0" anchor="ctr"/>
           <a:lstStyle/>
           <a:p>
-            <a:pPr algn="ctr" indent="0" marL="0">
+            <a:pPr marL="0" indent="0" algn="ctr">
               <a:buNone/>
             </a:pPr>
             <a:r>
@@ -8441,7 +7821,7 @@
           <a:bodyPr wrap="square" lIns="0" tIns="0" rIns="0" bIns="0" rtlCol="0" anchor="ctr"/>
           <a:lstStyle/>
           <a:p>
-            <a:pPr algn="ctr" indent="0" marL="0">
+            <a:pPr marL="0" indent="0" algn="ctr">
               <a:buNone/>
             </a:pPr>
             <a:r>
@@ -8483,7 +7863,7 @@
             <a:prstDash val="solid"/>
           </a:ln>
           <a:effectLst>
-            <a:outerShdw sx="100000" sy="100000" kx="0" ky="0" algn="bl" rotWithShape="0" blurRad="101600" dist="38100" dir="8100000">
+            <a:outerShdw blurRad="101600" dist="38100" dir="8100000" algn="bl" rotWithShape="0">
               <a:srgbClr val="000000">
                 <a:alpha val="12000"/>
               </a:srgbClr>
@@ -8537,7 +7917,7 @@
           <a:bodyPr wrap="square" lIns="0" tIns="0" rIns="0" bIns="0" rtlCol="0" anchor="ctr"/>
           <a:lstStyle/>
           <a:p>
-            <a:pPr algn="ctr" indent="0" marL="0">
+            <a:pPr marL="0" indent="0" algn="ctr">
               <a:buNone/>
             </a:pPr>
             <a:r>
@@ -8576,7 +7956,7 @@
           <a:bodyPr wrap="square" lIns="0" tIns="0" rIns="0" bIns="0" rtlCol="0" anchor="ctr"/>
           <a:lstStyle/>
           <a:p>
-            <a:pPr algn="ctr" indent="0" marL="0">
+            <a:pPr marL="0" indent="0" algn="ctr">
               <a:buNone/>
             </a:pPr>
             <a:r>
@@ -8640,7 +8020,7 @@
           <a:bodyPr wrap="square" rtlCol="0" anchor="ctr"/>
           <a:lstStyle/>
           <a:p>
-            <a:pPr algn="ctr" indent="0" marL="0">
+            <a:pPr marL="0" indent="0" algn="ctr">
               <a:buNone/>
             </a:pPr>
             <a:r>
@@ -8679,11 +8059,11 @@
           <a:bodyPr wrap="square" rtlCol="0" anchor="ctr"/>
           <a:lstStyle/>
           <a:p>
-            <a:pPr indent="0" marL="0">
-              <a:buNone/>
-            </a:pPr>
-            <a:r>
-              <a:rPr lang="en-US" sz="1000" b="1" spc="200" kern="0" dirty="0">
+            <a:pPr marL="0" indent="0">
+              <a:buNone/>
+            </a:pPr>
+            <a:r>
+              <a:rPr lang="en-US" sz="1000" b="1" kern="0" spc="200" dirty="0">
                 <a:solidFill>
                   <a:srgbClr val="94A3B8"/>
                 </a:solidFill>
@@ -8718,7 +8098,7 @@
           <a:bodyPr wrap="square" lIns="0" tIns="0" rIns="0" bIns="0" rtlCol="0" anchor="ctr"/>
           <a:lstStyle/>
           <a:p>
-            <a:pPr indent="0" marL="0">
+            <a:pPr marL="0" indent="0">
               <a:buNone/>
             </a:pPr>
             <a:r>
@@ -8782,7 +8162,7 @@
           <a:bodyPr wrap="square" lIns="0" tIns="0" rIns="0" bIns="0" rtlCol="0" anchor="ctr"/>
           <a:lstStyle/>
           <a:p>
-            <a:pPr indent="0" marL="0">
+            <a:pPr marL="0" indent="0">
               <a:buNone/>
             </a:pPr>
             <a:r>
@@ -8821,7 +8201,7 @@
           <a:bodyPr wrap="square" lIns="0" tIns="0" rIns="0" bIns="0" rtlCol="0" anchor="ctr"/>
           <a:lstStyle/>
           <a:p>
-            <a:pPr indent="0" marL="0">
+            <a:pPr marL="0" indent="0">
               <a:buNone/>
             </a:pPr>
             <a:r>
@@ -8885,7 +8265,7 @@
           <a:bodyPr wrap="square" lIns="0" tIns="0" rIns="0" bIns="0" rtlCol="0" anchor="ctr"/>
           <a:lstStyle/>
           <a:p>
-            <a:pPr indent="0" marL="0">
+            <a:pPr marL="0" indent="0">
               <a:buNone/>
             </a:pPr>
             <a:r>
@@ -8924,7 +8304,7 @@
           <a:bodyPr wrap="square" lIns="0" tIns="0" rIns="0" bIns="0" rtlCol="0" anchor="ctr"/>
           <a:lstStyle/>
           <a:p>
-            <a:pPr indent="0" marL="0">
+            <a:pPr marL="0" indent="0">
               <a:buNone/>
             </a:pPr>
             <a:r>
@@ -8988,7 +8368,7 @@
           <a:bodyPr wrap="square" lIns="0" tIns="0" rIns="0" bIns="0" rtlCol="0" anchor="ctr"/>
           <a:lstStyle/>
           <a:p>
-            <a:pPr indent="0" marL="0">
+            <a:pPr marL="0" indent="0">
               <a:buNone/>
             </a:pPr>
             <a:r>
@@ -9027,7 +8407,7 @@
           <a:bodyPr wrap="square" lIns="0" tIns="0" rIns="0" bIns="0" rtlCol="0" anchor="ctr"/>
           <a:lstStyle/>
           <a:p>
-            <a:pPr indent="0" marL="0">
+            <a:pPr marL="0" indent="0">
               <a:buNone/>
             </a:pPr>
             <a:r>
@@ -9091,7 +8471,7 @@
           <a:bodyPr wrap="square" lIns="0" tIns="0" rIns="0" bIns="0" rtlCol="0" anchor="ctr"/>
           <a:lstStyle/>
           <a:p>
-            <a:pPr indent="0" marL="0">
+            <a:pPr marL="0" indent="0">
               <a:buNone/>
             </a:pPr>
             <a:r>
@@ -9130,7 +8510,7 @@
           <a:bodyPr wrap="square" lIns="0" tIns="0" rIns="0" bIns="0" rtlCol="0" anchor="ctr"/>
           <a:lstStyle/>
           <a:p>
-            <a:pPr indent="0" marL="0">
+            <a:pPr marL="0" indent="0">
               <a:buNone/>
             </a:pPr>
             <a:r>
@@ -9194,7 +8574,7 @@
           <a:bodyPr wrap="square" lIns="0" tIns="0" rIns="0" bIns="0" rtlCol="0" anchor="ctr"/>
           <a:lstStyle/>
           <a:p>
-            <a:pPr indent="0" marL="0">
+            <a:pPr marL="0" indent="0">
               <a:buNone/>
             </a:pPr>
             <a:r>
@@ -9228,6 +8608,7 @@
         <a:solidFill>
           <a:srgbClr val="FFFFFF"/>
         </a:solidFill>
+        <a:effectLst/>
       </p:bgPr>
     </p:bg>
     <p:spTree>
@@ -9290,7 +8671,7 @@
           <a:bodyPr wrap="square" lIns="0" tIns="0" rIns="0" bIns="0" rtlCol="0" anchor="ctr"/>
           <a:lstStyle/>
           <a:p>
-            <a:pPr indent="0" marL="0">
+            <a:pPr marL="0" indent="0">
               <a:buNone/>
             </a:pPr>
             <a:r>
@@ -9329,7 +8710,7 @@
           <a:bodyPr wrap="square" lIns="0" tIns="0" rIns="0" bIns="0" rtlCol="0" anchor="ctr"/>
           <a:lstStyle/>
           <a:p>
-            <a:pPr indent="0" marL="0">
+            <a:pPr marL="0" indent="0">
               <a:buNone/>
             </a:pPr>
             <a:r>
@@ -9391,11 +8772,11 @@
           <a:bodyPr wrap="square" rtlCol="0" anchor="ctr"/>
           <a:lstStyle/>
           <a:p>
-            <a:pPr indent="0" marL="0">
-              <a:buNone/>
-            </a:pPr>
-            <a:r>
-              <a:rPr lang="en-US" sz="1000" b="1" spc="200" kern="0" dirty="0">
+            <a:pPr marL="0" indent="0">
+              <a:buNone/>
+            </a:pPr>
+            <a:r>
+              <a:rPr lang="en-US" sz="1000" b="1" kern="0" spc="200" dirty="0">
                 <a:solidFill>
                   <a:srgbClr val="94A3B8"/>
                 </a:solidFill>
@@ -9455,7 +8836,7 @@
           <a:bodyPr wrap="square" rtlCol="0" anchor="ctr"/>
           <a:lstStyle/>
           <a:p>
-            <a:pPr indent="0" marL="0">
+            <a:pPr marL="0" indent="0">
               <a:buNone/>
             </a:pPr>
             <a:r>
@@ -9519,7 +8900,7 @@
           <a:bodyPr wrap="square" rtlCol="0" anchor="ctr"/>
           <a:lstStyle/>
           <a:p>
-            <a:pPr indent="0" marL="0">
+            <a:pPr marL="0" indent="0">
               <a:buNone/>
             </a:pPr>
             <a:r>
@@ -9583,7 +8964,7 @@
           <a:bodyPr wrap="square" rtlCol="0" anchor="ctr"/>
           <a:lstStyle/>
           <a:p>
-            <a:pPr indent="0" marL="0">
+            <a:pPr marL="0" indent="0">
               <a:buNone/>
             </a:pPr>
             <a:r>
@@ -9647,7 +9028,7 @@
           <a:bodyPr wrap="square" rtlCol="0" anchor="ctr"/>
           <a:lstStyle/>
           <a:p>
-            <a:pPr indent="0" marL="0">
+            <a:pPr marL="0" indent="0">
               <a:buNone/>
             </a:pPr>
             <a:r>
@@ -9711,7 +9092,7 @@
           <a:bodyPr wrap="square" rtlCol="0" anchor="ctr"/>
           <a:lstStyle/>
           <a:p>
-            <a:pPr indent="0" marL="0">
+            <a:pPr marL="0" indent="0">
               <a:buNone/>
             </a:pPr>
             <a:r>
@@ -9775,7 +9156,7 @@
           <a:bodyPr wrap="square" rtlCol="0" anchor="ctr"/>
           <a:lstStyle/>
           <a:p>
-            <a:pPr indent="0" marL="0">
+            <a:pPr marL="0" indent="0">
               <a:buNone/>
             </a:pPr>
             <a:r>
@@ -9817,7 +9198,7 @@
             <a:prstDash val="solid"/>
           </a:ln>
           <a:effectLst>
-            <a:outerShdw sx="100000" sy="100000" kx="0" ky="0" algn="bl" rotWithShape="0" blurRad="101600" dist="38100" dir="8100000">
+            <a:outerShdw blurRad="101600" dist="38100" dir="8100000" algn="bl" rotWithShape="0">
               <a:srgbClr val="000000">
                 <a:alpha val="12000"/>
               </a:srgbClr>
@@ -9846,7 +9227,7 @@
           <a:bodyPr wrap="square" rtlCol="0" anchor="ctr"/>
           <a:lstStyle/>
           <a:p>
-            <a:pPr algn="ctr" indent="0" marL="0">
+            <a:pPr marL="0" indent="0" algn="ctr">
               <a:buNone/>
             </a:pPr>
             <a:r>
@@ -9863,7 +9244,7 @@
             <a:endParaRPr lang="en-US" sz="1400" dirty="0"/>
           </a:p>
           <a:p>
-            <a:pPr algn="ctr" indent="0" marL="0">
+            <a:pPr marL="0" indent="0" algn="ctr">
               <a:buNone/>
             </a:pPr>
             <a:r>
@@ -9925,7 +9306,7 @@
           <a:bodyPr wrap="square" lIns="0" tIns="0" rIns="0" bIns="0" rtlCol="0" anchor="ctr"/>
           <a:lstStyle/>
           <a:p>
-            <a:pPr indent="0" marL="0">
+            <a:pPr marL="0" indent="0">
               <a:buNone/>
             </a:pPr>
             <a:r>
@@ -9964,7 +9345,7 @@
           <a:bodyPr wrap="square" lIns="0" tIns="0" rIns="0" bIns="0" rtlCol="0" anchor="ctr"/>
           <a:lstStyle/>
           <a:p>
-            <a:pPr indent="0" marL="0">
+            <a:pPr marL="0" indent="0">
               <a:buNone/>
             </a:pPr>
             <a:r>
@@ -10003,7 +9384,7 @@
           <a:bodyPr wrap="square" lIns="0" tIns="0" rIns="0" bIns="0" rtlCol="0" anchor="ctr"/>
           <a:lstStyle/>
           <a:p>
-            <a:pPr indent="0" marL="0">
+            <a:pPr marL="0" indent="0">
               <a:buNone/>
             </a:pPr>
             <a:r>
@@ -10042,7 +9423,7 @@
           <a:bodyPr wrap="square" lIns="0" tIns="0" rIns="0" bIns="0" rtlCol="0" anchor="ctr"/>
           <a:lstStyle/>
           <a:p>
-            <a:pPr indent="0" marL="0">
+            <a:pPr marL="0" indent="0">
               <a:buNone/>
             </a:pPr>
             <a:r>
@@ -10081,7 +9462,7 @@
           <a:bodyPr wrap="square" lIns="0" tIns="0" rIns="0" bIns="0" rtlCol="0" anchor="ctr"/>
           <a:lstStyle/>
           <a:p>
-            <a:pPr indent="0" marL="0">
+            <a:pPr marL="0" indent="0">
               <a:buNone/>
             </a:pPr>
             <a:r>
@@ -10120,7 +9501,7 @@
           <a:bodyPr wrap="square" lIns="0" tIns="0" rIns="0" bIns="0" rtlCol="0" anchor="ctr"/>
           <a:lstStyle/>
           <a:p>
-            <a:pPr indent="0" marL="0">
+            <a:pPr marL="0" indent="0">
               <a:buNone/>
             </a:pPr>
             <a:r>
@@ -10159,7 +9540,7 @@
           <a:bodyPr wrap="square" lIns="0" tIns="0" rIns="0" bIns="0" rtlCol="0" anchor="ctr"/>
           <a:lstStyle/>
           <a:p>
-            <a:pPr indent="0" marL="0">
+            <a:pPr marL="0" indent="0">
               <a:buNone/>
             </a:pPr>
             <a:r>
@@ -10198,7 +9579,7 @@
           <a:bodyPr wrap="square" lIns="0" tIns="0" rIns="0" bIns="0" rtlCol="0" anchor="ctr"/>
           <a:lstStyle/>
           <a:p>
-            <a:pPr indent="0" marL="0">
+            <a:pPr marL="0" indent="0">
               <a:buNone/>
             </a:pPr>
             <a:r>
@@ -10260,7 +9641,7 @@
           <a:bodyPr wrap="square" rtlCol="0" anchor="ctr"/>
           <a:lstStyle/>
           <a:p>
-            <a:pPr algn="ctr" indent="0" marL="0">
+            <a:pPr marL="0" indent="0" algn="ctr">
               <a:buNone/>
             </a:pPr>
             <a:r>
@@ -10294,6 +9675,7 @@
         <a:solidFill>
           <a:srgbClr val="132845"/>
         </a:solidFill>
+        <a:effectLst/>
       </p:bgPr>
     </p:bg>
     <p:spTree>
@@ -10356,7 +9738,7 @@
           <a:bodyPr wrap="square" lIns="0" tIns="0" rIns="0" bIns="0" rtlCol="0" anchor="ctr"/>
           <a:lstStyle/>
           <a:p>
-            <a:pPr indent="0" marL="0">
+            <a:pPr marL="0" indent="0">
               <a:buNone/>
             </a:pPr>
             <a:r>
@@ -10468,7 +9850,7 @@
           <a:bodyPr wrap="square" lIns="0" tIns="0" rIns="0" bIns="0" rtlCol="0" anchor="ctr"/>
           <a:lstStyle/>
           <a:p>
-            <a:pPr indent="0" marL="0">
+            <a:pPr marL="0" indent="0">
               <a:buNone/>
             </a:pPr>
             <a:r>
@@ -10530,7 +9912,7 @@
           <a:bodyPr wrap="square" rtlCol="0" anchor="ctr"/>
           <a:lstStyle/>
           <a:p>
-            <a:pPr algn="ctr" indent="0" marL="0">
+            <a:pPr marL="0" indent="0" algn="ctr">
               <a:buNone/>
             </a:pPr>
             <a:r>
@@ -10556,7 +9938,7 @@
         </p:nvSpPr>
         <p:spPr>
           <a:xfrm>
-            <a:off x="3657600" y="640080"/>
+            <a:off x="3429000" y="640080"/>
             <a:ext cx="1828800" cy="1097280"/>
           </a:xfrm>
           <a:prstGeom prst="rect">
@@ -10569,7 +9951,7 @@
           <a:bodyPr wrap="square" lIns="0" tIns="0" rIns="0" bIns="0" rtlCol="0" anchor="ctr"/>
           <a:lstStyle/>
           <a:p>
-            <a:pPr algn="ctr" indent="0" marL="0">
+            <a:pPr marL="0" indent="0" algn="ctr">
               <a:buNone/>
             </a:pPr>
             <a:r>
@@ -10608,7 +9990,7 @@
           <a:bodyPr wrap="square" rtlCol="0" anchor="ctr"/>
           <a:lstStyle/>
           <a:p>
-            <a:pPr algn="ctr" indent="0" marL="0">
+            <a:pPr marL="0" indent="0" algn="ctr">
               <a:buNone/>
             </a:pPr>
             <a:r>
@@ -10647,7 +10029,7 @@
           <a:bodyPr wrap="square" rtlCol="0" anchor="ctr"/>
           <a:lstStyle/>
           <a:p>
-            <a:pPr algn="ctr" indent="0" marL="0">
+            <a:pPr marL="0" indent="0" algn="ctr">
               <a:buNone/>
             </a:pPr>
             <a:r>
@@ -10708,7 +10090,7 @@
           <a:bodyPr wrap="square" rtlCol="0" anchor="ctr"/>
           <a:lstStyle/>
           <a:p>
-            <a:pPr indent="0" marL="0">
+            <a:pPr marL="0" indent="0">
               <a:buNone/>
             </a:pPr>
             <a:r>
@@ -10747,7 +10129,7 @@
           <a:bodyPr wrap="square" rtlCol="0" anchor="ctr"/>
           <a:lstStyle/>
           <a:p>
-            <a:pPr algn="ctr" indent="0" marL="0">
+            <a:pPr marL="0" indent="0" algn="ctr">
               <a:buNone/>
             </a:pPr>
             <a:r>
@@ -10808,7 +10190,7 @@
           <a:bodyPr wrap="square" rtlCol="0" anchor="ctr"/>
           <a:lstStyle/>
           <a:p>
-            <a:pPr indent="0" marL="0">
+            <a:pPr marL="0" indent="0">
               <a:buNone/>
             </a:pPr>
             <a:r>
@@ -10847,7 +10229,7 @@
           <a:bodyPr wrap="square" rtlCol="0" anchor="ctr"/>
           <a:lstStyle/>
           <a:p>
-            <a:pPr algn="ctr" indent="0" marL="0">
+            <a:pPr marL="0" indent="0" algn="ctr">
               <a:buNone/>
             </a:pPr>
             <a:r>
@@ -10908,7 +10290,7 @@
           <a:bodyPr wrap="square" rtlCol="0" anchor="ctr"/>
           <a:lstStyle/>
           <a:p>
-            <a:pPr indent="0" marL="0">
+            <a:pPr marL="0" indent="0">
               <a:buNone/>
             </a:pPr>
             <a:r>
@@ -10947,7 +10329,7 @@
           <a:bodyPr wrap="square" rtlCol="0" anchor="ctr"/>
           <a:lstStyle/>
           <a:p>
-            <a:pPr algn="ctr" indent="0" marL="0">
+            <a:pPr marL="0" indent="0" algn="ctr">
               <a:buNone/>
             </a:pPr>
             <a:r>
@@ -11008,7 +10390,7 @@
           <a:bodyPr wrap="square" rtlCol="0" anchor="ctr"/>
           <a:lstStyle/>
           <a:p>
-            <a:pPr indent="0" marL="0">
+            <a:pPr marL="0" indent="0">
               <a:buNone/>
             </a:pPr>
             <a:r>
@@ -11047,7 +10429,7 @@
           <a:bodyPr wrap="square" rtlCol="0" anchor="ctr"/>
           <a:lstStyle/>
           <a:p>
-            <a:pPr algn="ctr" indent="0" marL="0">
+            <a:pPr marL="0" indent="0" algn="ctr">
               <a:buNone/>
             </a:pPr>
             <a:r>
@@ -11108,7 +10490,7 @@
           <a:bodyPr wrap="square" rtlCol="0" anchor="ctr"/>
           <a:lstStyle/>
           <a:p>
-            <a:pPr indent="0" marL="0">
+            <a:pPr marL="0" indent="0">
               <a:buNone/>
             </a:pPr>
             <a:r>
@@ -11142,6 +10524,7 @@
         <a:solidFill>
           <a:srgbClr val="FFFFFF"/>
         </a:solidFill>
+        <a:effectLst/>
       </p:bgPr>
     </p:bg>
     <p:spTree>
@@ -11204,7 +10587,7 @@
           <a:bodyPr wrap="square" lIns="0" tIns="0" rIns="0" bIns="0" rtlCol="0" anchor="ctr"/>
           <a:lstStyle/>
           <a:p>
-            <a:pPr indent="0" marL="0">
+            <a:pPr marL="0" indent="0">
               <a:buNone/>
             </a:pPr>
             <a:r>
@@ -11243,7 +10626,7 @@
           <a:bodyPr wrap="square" lIns="0" tIns="0" rIns="0" bIns="0" rtlCol="0" anchor="ctr"/>
           <a:lstStyle/>
           <a:p>
-            <a:pPr indent="0" marL="0">
+            <a:pPr marL="0" indent="0">
               <a:buNone/>
             </a:pPr>
             <a:r>
@@ -11330,7 +10713,7 @@
           <a:bodyPr wrap="square" rtlCol="0" anchor="ctr"/>
           <a:lstStyle/>
           <a:p>
-            <a:pPr algn="ctr" indent="0" marL="0">
+            <a:pPr marL="0" indent="0" algn="ctr">
               <a:buNone/>
             </a:pPr>
             <a:r>
@@ -11394,7 +10777,7 @@
           <a:bodyPr wrap="square" lIns="0" tIns="0" rIns="0" bIns="0" rtlCol="0" anchor="ctr"/>
           <a:lstStyle/>
           <a:p>
-            <a:pPr indent="0" marL="0">
+            <a:pPr marL="0" indent="0">
               <a:buNone/>
             </a:pPr>
             <a:r>
@@ -11458,7 +10841,7 @@
           <a:bodyPr wrap="square" lIns="0" tIns="0" rIns="0" bIns="0" rtlCol="0" anchor="ctr"/>
           <a:lstStyle/>
           <a:p>
-            <a:pPr indent="0" marL="0">
+            <a:pPr marL="0" indent="0">
               <a:buNone/>
             </a:pPr>
             <a:r>
@@ -11522,7 +10905,7 @@
           <a:bodyPr wrap="square" lIns="0" tIns="0" rIns="0" bIns="0" rtlCol="0" anchor="ctr"/>
           <a:lstStyle/>
           <a:p>
-            <a:pPr indent="0" marL="0">
+            <a:pPr marL="0" indent="0">
               <a:buNone/>
             </a:pPr>
             <a:r>
@@ -11586,7 +10969,7 @@
           <a:bodyPr wrap="square" lIns="0" tIns="0" rIns="0" bIns="0" rtlCol="0" anchor="ctr"/>
           <a:lstStyle/>
           <a:p>
-            <a:pPr indent="0" marL="0">
+            <a:pPr marL="0" indent="0">
               <a:buNone/>
             </a:pPr>
             <a:r>
@@ -11650,7 +11033,7 @@
           <a:bodyPr wrap="square" rtlCol="0" anchor="ctr"/>
           <a:lstStyle/>
           <a:p>
-            <a:pPr algn="ctr" indent="0" marL="0">
+            <a:pPr marL="0" indent="0" algn="ctr">
               <a:buNone/>
             </a:pPr>
             <a:r>
@@ -11739,7 +11122,7 @@
           <a:bodyPr wrap="square" rtlCol="0" anchor="ctr"/>
           <a:lstStyle/>
           <a:p>
-            <a:pPr algn="ctr" indent="0" marL="0">
+            <a:pPr marL="0" indent="0" algn="ctr">
               <a:buNone/>
             </a:pPr>
             <a:r>
@@ -11778,7 +11161,7 @@
           <a:bodyPr wrap="square" lIns="0" tIns="0" rIns="0" bIns="0" rtlCol="0" anchor="ctr"/>
           <a:lstStyle/>
           <a:p>
-            <a:pPr indent="0" marL="0">
+            <a:pPr marL="0" indent="0">
               <a:buNone/>
             </a:pPr>
             <a:r>
@@ -11867,7 +11250,7 @@
           <a:bodyPr wrap="square" rtlCol="0" anchor="ctr"/>
           <a:lstStyle/>
           <a:p>
-            <a:pPr algn="ctr" indent="0" marL="0">
+            <a:pPr marL="0" indent="0" algn="ctr">
               <a:buNone/>
             </a:pPr>
             <a:r>
@@ -11906,7 +11289,7 @@
           <a:bodyPr wrap="square" lIns="0" tIns="0" rIns="0" bIns="0" rtlCol="0" anchor="ctr"/>
           <a:lstStyle/>
           <a:p>
-            <a:pPr indent="0" marL="0">
+            <a:pPr marL="0" indent="0">
               <a:buNone/>
             </a:pPr>
             <a:r>
@@ -11995,7 +11378,7 @@
           <a:bodyPr wrap="square" rtlCol="0" anchor="ctr"/>
           <a:lstStyle/>
           <a:p>
-            <a:pPr algn="ctr" indent="0" marL="0">
+            <a:pPr marL="0" indent="0" algn="ctr">
               <a:buNone/>
             </a:pPr>
             <a:r>
@@ -12034,7 +11417,7 @@
           <a:bodyPr wrap="square" lIns="0" tIns="0" rIns="0" bIns="0" rtlCol="0" anchor="ctr"/>
           <a:lstStyle/>
           <a:p>
-            <a:pPr indent="0" marL="0">
+            <a:pPr marL="0" indent="0">
               <a:buNone/>
             </a:pPr>
             <a:r>
@@ -12123,7 +11506,7 @@
           <a:bodyPr wrap="square" rtlCol="0" anchor="ctr"/>
           <a:lstStyle/>
           <a:p>
-            <a:pPr algn="ctr" indent="0" marL="0">
+            <a:pPr marL="0" indent="0" algn="ctr">
               <a:buNone/>
             </a:pPr>
             <a:r>
@@ -12162,7 +11545,7 @@
           <a:bodyPr wrap="square" lIns="0" tIns="0" rIns="0" bIns="0" rtlCol="0" anchor="ctr"/>
           <a:lstStyle/>
           <a:p>
-            <a:pPr indent="0" marL="0">
+            <a:pPr marL="0" indent="0">
               <a:buNone/>
             </a:pPr>
             <a:r>
@@ -12481,4 +11864,319 @@
     </a:ext>
   </a:extLst>
 </a:theme>
+</file>
+
+<file path=ppt/theme/theme2.xml><?xml version="1.0" encoding="utf-8"?>
+<a:theme xmlns:a="http://schemas.openxmlformats.org/drawingml/2006/main" name="Office Theme">
+  <a:themeElements>
+    <a:clrScheme name="Office">
+      <a:dk1>
+        <a:sysClr val="windowText" lastClr="000000"/>
+      </a:dk1>
+      <a:lt1>
+        <a:sysClr val="window" lastClr="FFFFFF"/>
+      </a:lt1>
+      <a:dk2>
+        <a:srgbClr val="0E2841"/>
+      </a:dk2>
+      <a:lt2>
+        <a:srgbClr val="E8E8E8"/>
+      </a:lt2>
+      <a:accent1>
+        <a:srgbClr val="156082"/>
+      </a:accent1>
+      <a:accent2>
+        <a:srgbClr val="E97132"/>
+      </a:accent2>
+      <a:accent3>
+        <a:srgbClr val="196B24"/>
+      </a:accent3>
+      <a:accent4>
+        <a:srgbClr val="0F9ED5"/>
+      </a:accent4>
+      <a:accent5>
+        <a:srgbClr val="A02B93"/>
+      </a:accent5>
+      <a:accent6>
+        <a:srgbClr val="4EA72E"/>
+      </a:accent6>
+      <a:hlink>
+        <a:srgbClr val="467886"/>
+      </a:hlink>
+      <a:folHlink>
+        <a:srgbClr val="96607D"/>
+      </a:folHlink>
+    </a:clrScheme>
+    <a:fontScheme name="Office">
+      <a:majorFont>
+        <a:latin typeface="Aptos Display" panose="02110004020202020204"/>
+        <a:ea typeface=""/>
+        <a:cs typeface=""/>
+        <a:font script="Jpan" typeface="游ゴシック Light"/>
+        <a:font script="Hang" typeface="맑은 고딕"/>
+        <a:font script="Hans" typeface="等线 Light"/>
+        <a:font script="Hant" typeface="新細明體"/>
+        <a:font script="Arab" typeface="Times New Roman"/>
+        <a:font script="Hebr" typeface="Times New Roman"/>
+        <a:font script="Thai" typeface="Angsana New"/>
+        <a:font script="Ethi" typeface="Nyala"/>
+        <a:font script="Beng" typeface="Vrinda"/>
+        <a:font script="Gujr" typeface="Shruti"/>
+        <a:font script="Khmr" typeface="MoolBoran"/>
+        <a:font script="Knda" typeface="Tunga"/>
+        <a:font script="Guru" typeface="Raavi"/>
+        <a:font script="Cans" typeface="Euphemia"/>
+        <a:font script="Cher" typeface="Plantagenet Cherokee"/>
+        <a:font script="Yiii" typeface="Microsoft Yi Baiti"/>
+        <a:font script="Tibt" typeface="Microsoft Himalaya"/>
+        <a:font script="Thaa" typeface="MV Boli"/>
+        <a:font script="Deva" typeface="Mangal"/>
+        <a:font script="Telu" typeface="Gautami"/>
+        <a:font script="Taml" typeface="Latha"/>
+        <a:font script="Syrc" typeface="Estrangelo Edessa"/>
+        <a:font script="Orya" typeface="Kalinga"/>
+        <a:font script="Mlym" typeface="Kartika"/>
+        <a:font script="Laoo" typeface="DokChampa"/>
+        <a:font script="Sinh" typeface="Iskoola Pota"/>
+        <a:font script="Mong" typeface="Mongolian Baiti"/>
+        <a:font script="Viet" typeface="Times New Roman"/>
+        <a:font script="Uigh" typeface="Microsoft Uighur"/>
+        <a:font script="Geor" typeface="Sylfaen"/>
+        <a:font script="Armn" typeface="Arial"/>
+        <a:font script="Bugi" typeface="Leelawadee UI"/>
+        <a:font script="Bopo" typeface="Microsoft JhengHei"/>
+        <a:font script="Java" typeface="Javanese Text"/>
+        <a:font script="Lisu" typeface="Segoe UI"/>
+        <a:font script="Mymr" typeface="Myanmar Text"/>
+        <a:font script="Nkoo" typeface="Ebrima"/>
+        <a:font script="Olck" typeface="Nirmala UI"/>
+        <a:font script="Osma" typeface="Ebrima"/>
+        <a:font script="Phag" typeface="Phagspa"/>
+        <a:font script="Syrn" typeface="Estrangelo Edessa"/>
+        <a:font script="Syrj" typeface="Estrangelo Edessa"/>
+        <a:font script="Syre" typeface="Estrangelo Edessa"/>
+        <a:font script="Sora" typeface="Nirmala UI"/>
+        <a:font script="Tale" typeface="Microsoft Tai Le"/>
+        <a:font script="Talu" typeface="Microsoft New Tai Lue"/>
+        <a:font script="Tfng" typeface="Ebrima"/>
+      </a:majorFont>
+      <a:minorFont>
+        <a:latin typeface="Aptos" panose="02110004020202020204"/>
+        <a:ea typeface=""/>
+        <a:cs typeface=""/>
+        <a:font script="Jpan" typeface="游ゴシック"/>
+        <a:font script="Hang" typeface="맑은 고딕"/>
+        <a:font script="Hans" typeface="等线"/>
+        <a:font script="Hant" typeface="新細明體"/>
+        <a:font script="Arab" typeface="Arial"/>
+        <a:font script="Hebr" typeface="Arial"/>
+        <a:font script="Thai" typeface="Cordia New"/>
+        <a:font script="Ethi" typeface="Nyala"/>
+        <a:font script="Beng" typeface="Vrinda"/>
+        <a:font script="Gujr" typeface="Shruti"/>
+        <a:font script="Khmr" typeface="DaunPenh"/>
+        <a:font script="Knda" typeface="Tunga"/>
+        <a:font script="Guru" typeface="Raavi"/>
+        <a:font script="Cans" typeface="Euphemia"/>
+        <a:font script="Cher" typeface="Plantagenet Cherokee"/>
+        <a:font script="Yiii" typeface="Microsoft Yi Baiti"/>
+        <a:font script="Tibt" typeface="Microsoft Himalaya"/>
+        <a:font script="Thaa" typeface="MV Boli"/>
+        <a:font script="Deva" typeface="Mangal"/>
+        <a:font script="Telu" typeface="Gautami"/>
+        <a:font script="Taml" typeface="Latha"/>
+        <a:font script="Syrc" typeface="Estrangelo Edessa"/>
+        <a:font script="Orya" typeface="Kalinga"/>
+        <a:font script="Mlym" typeface="Kartika"/>
+        <a:font script="Laoo" typeface="DokChampa"/>
+        <a:font script="Sinh" typeface="Iskoola Pota"/>
+        <a:font script="Mong" typeface="Mongolian Baiti"/>
+        <a:font script="Viet" typeface="Arial"/>
+        <a:font script="Uigh" typeface="Microsoft Uighur"/>
+        <a:font script="Geor" typeface="Sylfaen"/>
+        <a:font script="Armn" typeface="Arial"/>
+        <a:font script="Bugi" typeface="Leelawadee UI"/>
+        <a:font script="Bopo" typeface="Microsoft JhengHei"/>
+        <a:font script="Java" typeface="Javanese Text"/>
+        <a:font script="Lisu" typeface="Segoe UI"/>
+        <a:font script="Mymr" typeface="Myanmar Text"/>
+        <a:font script="Nkoo" typeface="Ebrima"/>
+        <a:font script="Olck" typeface="Nirmala UI"/>
+        <a:font script="Osma" typeface="Ebrima"/>
+        <a:font script="Phag" typeface="Phagspa"/>
+        <a:font script="Syrn" typeface="Estrangelo Edessa"/>
+        <a:font script="Syrj" typeface="Estrangelo Edessa"/>
+        <a:font script="Syre" typeface="Estrangelo Edessa"/>
+        <a:font script="Sora" typeface="Nirmala UI"/>
+        <a:font script="Tale" typeface="Microsoft Tai Le"/>
+        <a:font script="Talu" typeface="Microsoft New Tai Lue"/>
+        <a:font script="Tfng" typeface="Ebrima"/>
+      </a:minorFont>
+    </a:fontScheme>
+    <a:fmtScheme name="Office">
+      <a:fillStyleLst>
+        <a:solidFill>
+          <a:schemeClr val="phClr"/>
+        </a:solidFill>
+        <a:gradFill rotWithShape="1">
+          <a:gsLst>
+            <a:gs pos="0">
+              <a:schemeClr val="phClr">
+                <a:lumMod val="110000"/>
+                <a:satMod val="105000"/>
+                <a:tint val="67000"/>
+              </a:schemeClr>
+            </a:gs>
+            <a:gs pos="50000">
+              <a:schemeClr val="phClr">
+                <a:lumMod val="105000"/>
+                <a:satMod val="103000"/>
+                <a:tint val="73000"/>
+              </a:schemeClr>
+            </a:gs>
+            <a:gs pos="100000">
+              <a:schemeClr val="phClr">
+                <a:lumMod val="105000"/>
+                <a:satMod val="109000"/>
+                <a:tint val="81000"/>
+              </a:schemeClr>
+            </a:gs>
+          </a:gsLst>
+          <a:lin ang="5400000" scaled="0"/>
+        </a:gradFill>
+        <a:gradFill rotWithShape="1">
+          <a:gsLst>
+            <a:gs pos="0">
+              <a:schemeClr val="phClr">
+                <a:satMod val="103000"/>
+                <a:lumMod val="102000"/>
+                <a:tint val="94000"/>
+              </a:schemeClr>
+            </a:gs>
+            <a:gs pos="50000">
+              <a:schemeClr val="phClr">
+                <a:satMod val="110000"/>
+                <a:lumMod val="100000"/>
+                <a:shade val="100000"/>
+              </a:schemeClr>
+            </a:gs>
+            <a:gs pos="100000">
+              <a:schemeClr val="phClr">
+                <a:lumMod val="99000"/>
+                <a:satMod val="120000"/>
+                <a:shade val="78000"/>
+              </a:schemeClr>
+            </a:gs>
+          </a:gsLst>
+          <a:lin ang="5400000" scaled="0"/>
+        </a:gradFill>
+      </a:fillStyleLst>
+      <a:lnStyleLst>
+        <a:ln w="12700" cap="flat" cmpd="sng" algn="ctr">
+          <a:solidFill>
+            <a:schemeClr val="phClr"/>
+          </a:solidFill>
+          <a:prstDash val="solid"/>
+          <a:miter lim="800000"/>
+        </a:ln>
+        <a:ln w="19050" cap="flat" cmpd="sng" algn="ctr">
+          <a:solidFill>
+            <a:schemeClr val="phClr"/>
+          </a:solidFill>
+          <a:prstDash val="solid"/>
+          <a:miter lim="800000"/>
+        </a:ln>
+        <a:ln w="25400" cap="flat" cmpd="sng" algn="ctr">
+          <a:solidFill>
+            <a:schemeClr val="phClr"/>
+          </a:solidFill>
+          <a:prstDash val="solid"/>
+          <a:miter lim="800000"/>
+        </a:ln>
+      </a:lnStyleLst>
+      <a:effectStyleLst>
+        <a:effectStyle>
+          <a:effectLst/>
+        </a:effectStyle>
+        <a:effectStyle>
+          <a:effectLst/>
+        </a:effectStyle>
+        <a:effectStyle>
+          <a:effectLst>
+            <a:outerShdw blurRad="57150" dist="19050" dir="5400000" algn="ctr" rotWithShape="0">
+              <a:srgbClr val="000000">
+                <a:alpha val="63000"/>
+              </a:srgbClr>
+            </a:outerShdw>
+          </a:effectLst>
+        </a:effectStyle>
+      </a:effectStyleLst>
+      <a:bgFillStyleLst>
+        <a:solidFill>
+          <a:schemeClr val="phClr"/>
+        </a:solidFill>
+        <a:solidFill>
+          <a:schemeClr val="phClr">
+            <a:tint val="95000"/>
+            <a:satMod val="170000"/>
+          </a:schemeClr>
+        </a:solidFill>
+        <a:gradFill rotWithShape="1">
+          <a:gsLst>
+            <a:gs pos="0">
+              <a:schemeClr val="phClr">
+                <a:tint val="93000"/>
+                <a:satMod val="150000"/>
+                <a:shade val="98000"/>
+                <a:lumMod val="102000"/>
+              </a:schemeClr>
+            </a:gs>
+            <a:gs pos="50000">
+              <a:schemeClr val="phClr">
+                <a:tint val="98000"/>
+                <a:satMod val="130000"/>
+                <a:shade val="90000"/>
+                <a:lumMod val="103000"/>
+              </a:schemeClr>
+            </a:gs>
+            <a:gs pos="100000">
+              <a:schemeClr val="phClr">
+                <a:shade val="63000"/>
+                <a:satMod val="120000"/>
+              </a:schemeClr>
+            </a:gs>
+          </a:gsLst>
+          <a:lin ang="5400000" scaled="0"/>
+        </a:gradFill>
+      </a:bgFillStyleLst>
+    </a:fmtScheme>
+  </a:themeElements>
+  <a:objectDefaults>
+    <a:lnDef>
+      <a:spPr/>
+      <a:bodyPr/>
+      <a:lstStyle/>
+      <a:style>
+        <a:lnRef idx="2">
+          <a:schemeClr val="accent1"/>
+        </a:lnRef>
+        <a:fillRef idx="0">
+          <a:schemeClr val="accent1"/>
+        </a:fillRef>
+        <a:effectRef idx="1">
+          <a:schemeClr val="accent1"/>
+        </a:effectRef>
+        <a:fontRef idx="minor">
+          <a:schemeClr val="tx1"/>
+        </a:fontRef>
+      </a:style>
+    </a:lnDef>
+  </a:objectDefaults>
+  <a:extraClrSchemeLst/>
+  <a:extLst>
+    <a:ext uri="{05A4C25C-085E-4340-85A3-A5531E510DB2}">
+      <thm15:themeFamily xmlns:thm15="http://schemas.microsoft.com/office/thememl/2012/main" name="Office Theme" id="{2E142A2C-CD16-42D6-873A-C26D2A0506FA}" vid="{1BDDFF52-6CD6-40A5-AB3C-68EB2F1E4D0A}"/>
+    </a:ext>
+  </a:extLst>
+</a:theme>
 </file>